--- a/deck/창의프로젝트_서비스계획수립_Trace.pptx
+++ b/deck/창의프로젝트_서비스계획수립_Trace.pptx
@@ -1209,7 +1209,7 @@
               </a:defRPr>
             </a:pPr>
             <a:r>
-              <a:rPr sz="1450" b="0">
+              <a:rPr sz="1400" b="0">
                 <a:solidFill>
                   <a:srgbClr val="182E43"/>
                 </a:solidFill>
@@ -1217,7 +1217,7 @@
                 <a:ea typeface="Noto Sans CJK KR"/>
                 <a:cs typeface="Noto Sans CJK KR"/>
               </a:rPr>
-              <a:t>대상 ·  과제 · 공모전 · 외주 결과물을 컴퓨터로 만들어 제출하는 사람</a:t>
+              <a:t>대상 ·  컴퓨터로 배우고 과제를 만드는 학습자, 그리고 이를 지도하는 교육자</a:t>
             </a:r>
           </a:p>
           <a:p>
@@ -1227,7 +1227,7 @@
               </a:spcAft>
             </a:pPr>
             <a:r>
-              <a:rPr sz="1450" b="0">
+              <a:rPr sz="1400" b="0">
                 <a:solidFill>
                   <a:srgbClr val="182E43"/>
                 </a:solidFill>
@@ -1235,7 +1235,7 @@
                 <a:ea typeface="Noto Sans CJK KR"/>
                 <a:cs typeface="Noto Sans CJK KR"/>
               </a:rPr>
-              <a:t>상황 ·  제출 직후 “AI로 만든 것 아니냐”는 의심을 받는 순간</a:t>
+              <a:t>상황 ·  학습이나 제작을 마친 뒤, 그 과정을 돌아보려 할 때</a:t>
             </a:r>
           </a:p>
           <a:p>
@@ -1245,7 +1245,7 @@
               </a:spcAft>
             </a:pPr>
             <a:r>
-              <a:rPr sz="1450" b="0">
+              <a:rPr sz="1400" b="0">
                 <a:solidFill>
                   <a:srgbClr val="182E43"/>
                 </a:solidFill>
@@ -1253,7 +1253,7 @@
                 <a:ea typeface="Noto Sans CJK KR"/>
                 <a:cs typeface="Noto Sans CJK KR"/>
               </a:rPr>
-              <a:t>불편 ·  결백해도 내놓을 자료가 없다. 초고와 수정 흔적은 본인 PC 에만 남는다</a:t>
+              <a:t>제약 ·  결과물만 남고 과정은 사라진다. AI 를 쓰면 막힌 지점조차 남지 않는다</a:t>
             </a:r>
           </a:p>
           <a:p>
@@ -1263,7 +1263,7 @@
               </a:spcAft>
             </a:pPr>
             <a:r>
-              <a:rPr sz="1450" b="0">
+              <a:rPr sz="1400" b="0">
                 <a:solidFill>
                   <a:srgbClr val="182E43"/>
                 </a:solidFill>
@@ -1271,7 +1271,7 @@
                 <a:ea typeface="Noto Sans CJK KR"/>
                 <a:cs typeface="Noto Sans CJK KR"/>
               </a:rPr>
-              <a:t>대응 ·  타임랩스 · 초안 캡처를 보내지만 “그것도 만들 수 있다”로 끝난다</a:t>
+              <a:t>학습자 ·  무엇을 배웠고 어디서 막혔는지 확인할 수 없다</a:t>
             </a:r>
           </a:p>
           <a:p>
@@ -1281,7 +1281,7 @@
               </a:spcAft>
             </a:pPr>
             <a:r>
-              <a:rPr sz="1450" b="0">
+              <a:rPr sz="1400" b="0">
                 <a:solidFill>
                   <a:srgbClr val="182E43"/>
                 </a:solidFill>
@@ -1289,7 +1289,7 @@
                 <a:ea typeface="Noto Sans CJK KR"/>
                 <a:cs typeface="Noto Sans CJK KR"/>
               </a:rPr>
-              <a:t>영향 ·  오탐은 되돌리기 어렵다. 학점 · 수상 · 다음 의뢰가 걸려 있다</a:t>
+              <a:t>교육자 ·  학습이 어디서 일어났는지 볼 수 없다</a:t>
             </a:r>
           </a:p>
         </p:txBody>
@@ -1341,7 +1341,7 @@
               </a:defRPr>
             </a:pPr>
             <a:r>
-              <a:rPr sz="1250" b="0">
+              <a:rPr sz="1200" b="0">
                 <a:solidFill>
                   <a:srgbClr val="516274"/>
                 </a:solidFill>
@@ -1349,7 +1349,7 @@
                 <a:ea typeface="Noto Sans CJK KR"/>
                 <a:cs typeface="Noto Sans CJK KR"/>
               </a:rPr>
-              <a:t>확인된 사실 ·  탐지기 오탐은 이미 측정됐고, 기관이 사용을 중단할 만큼 컸다</a:t>
+              <a:t>확인된 사실 ·  LLM 으로 쓴 집단은 자기 글을 기억하지 못했다 (78%, 동료심사 전 공개본)</a:t>
             </a:r>
           </a:p>
           <a:p>
@@ -1359,7 +1359,7 @@
               </a:spcAft>
             </a:pPr>
             <a:r>
-              <a:rPr sz="1250" b="0">
+              <a:rPr sz="1200" b="0">
                 <a:solidFill>
                   <a:srgbClr val="516274"/>
                 </a:solidFill>
@@ -1367,7 +1367,7 @@
                 <a:ea typeface="Noto Sans CJK KR"/>
                 <a:cs typeface="Noto Sans CJK KR"/>
               </a:rPr>
-              <a:t>팀의 추정 ·  오탐 경험이 제출자의 행동을 바꾼다 → 인터뷰로 검증 예정</a:t>
+              <a:t>팀의 추정 ·  과정을 되돌아보게 하면 그 손실을 줄일 수 있다 → RQ1 로 검증 예정</a:t>
             </a:r>
           </a:p>
           <a:p>
@@ -1377,7 +1377,7 @@
               </a:spcAft>
             </a:pPr>
             <a:r>
-              <a:rPr sz="1250" b="0">
+              <a:rPr sz="1200" b="0">
                 <a:solidFill>
                   <a:srgbClr val="516274"/>
                 </a:solidFill>
@@ -1385,7 +1385,7 @@
                 <a:ea typeface="Noto Sans CJK KR"/>
                 <a:cs typeface="Noto Sans CJK KR"/>
               </a:rPr>
-              <a:t>이번 범위 ·  컴퓨터에서 만든 결과물의 ‘제작 과정 기록’ 에 한정한다.</a:t>
+              <a:t>이번 범위 ·  컴퓨터에서 일어난 학습 · 제작 과정의 ‘기록과 회고’ 에 한정한다.</a:t>
             </a:r>
           </a:p>
           <a:p>
@@ -1395,7 +1395,7 @@
               </a:spcAft>
             </a:pPr>
             <a:r>
-              <a:rPr sz="1250" b="0">
+              <a:rPr sz="1200" b="0">
                 <a:solidFill>
                   <a:srgbClr val="516274"/>
                 </a:solidFill>
@@ -1403,7 +1403,7 @@
                 <a:ea typeface="Noto Sans CJK KR"/>
                 <a:cs typeface="Noto Sans CJK KR"/>
               </a:rPr>
-              <a:t>                    AI 사용 여부 판정은 범위 밖에 둔다</a:t>
+              <a:t>                    이해도 측정과 AI 사용 여부 판정은 범위 밖에 둔다</a:t>
             </a:r>
           </a:p>
         </p:txBody>
@@ -1694,7 +1694,7 @@
                           <a:ea typeface="Noto Sans CJK KR"/>
                           <a:cs typeface="Noto Sans CJK KR"/>
                         </a:rPr>
-                        <a:t>Liang, W. et al. (2023)</a:t>
+                        <a:t>MIT Media Lab (2025) — 54명 EEG 실험</a:t>
                       </a:r>
                     </a:p>
                     <a:p>
@@ -1712,7 +1712,7 @@
                           <a:ea typeface="Noto Sans CJK KR"/>
                           <a:cs typeface="Noto Sans CJK KR"/>
                         </a:rPr>
-                        <a:t>비영어권 TOEFL 에세이로 GPT 탐지기 오탐률 측정</a:t>
+                        <a:t>LLM · 검색 · 무도구 세 집단의 에세이 작성 비교</a:t>
                       </a:r>
                     </a:p>
                   </a:txBody>
@@ -1733,7 +1733,7 @@
                         </a:spcAft>
                       </a:pPr>
                       <a:r>
-                        <a:rPr sz="950" b="0">
+                        <a:rPr sz="900" b="0">
                           <a:solidFill>
                             <a:srgbClr val="182E43"/>
                           </a:solidFill>
@@ -1741,7 +1741,7 @@
                           <a:ea typeface="Noto Sans CJK KR"/>
                           <a:cs typeface="Noto Sans CJK KR"/>
                         </a:rPr>
-                        <a:t>비영어권 작성자가 오탐 대상이 된다.</a:t>
+                        <a:t>LLM 집단은 뇌 연결성이 가장 약했다.</a:t>
                       </a:r>
                     </a:p>
                     <a:p>
@@ -1751,7 +1751,7 @@
                         </a:spcAft>
                       </a:pPr>
                       <a:r>
-                        <a:rPr sz="950" b="0">
+                        <a:rPr sz="900" b="0">
                           <a:solidFill>
                             <a:srgbClr val="182E43"/>
                           </a:solidFill>
@@ -1759,7 +1759,25 @@
                           <a:ea typeface="Noto Sans CJK KR"/>
                           <a:cs typeface="Noto Sans CJK KR"/>
                         </a:rPr>
-                        <a:t>우리 팀과 국내 사용자가 그 대상에 속한다</a:t>
+                        <a:t>78% 가 자기 글을 한 구절도 인용 못 함</a:t>
+                      </a:r>
+                    </a:p>
+                    <a:p>
+                      <a:pPr>
+                        <a:spcAft>
+                          <a:spcPts val="100"/>
+                        </a:spcAft>
+                      </a:pPr>
+                      <a:r>
+                        <a:rPr sz="900" b="0">
+                          <a:solidFill>
+                            <a:srgbClr val="182E43"/>
+                          </a:solidFill>
+                          <a:latin typeface="Noto Sans CJK KR"/>
+                          <a:ea typeface="Noto Sans CJK KR"/>
+                          <a:cs typeface="Noto Sans CJK KR"/>
+                        </a:rPr>
+                        <a:t>→ 회고가 불가능하다</a:t>
                       </a:r>
                     </a:p>
                   </a:txBody>
@@ -1858,7 +1876,7 @@
                         </a:spcAft>
                       </a:pPr>
                       <a:r>
-                        <a:rPr sz="950" b="0">
+                        <a:rPr sz="900" b="0">
                           <a:solidFill>
                             <a:srgbClr val="182E43"/>
                           </a:solidFill>
@@ -1866,7 +1884,7 @@
                           <a:ea typeface="Noto Sans CJK KR"/>
                           <a:cs typeface="Noto Sans CJK KR"/>
                         </a:rPr>
-                        <a:t>기관이 탐지를 포기할 만큼 오탐 비용이 크다.</a:t>
+                        <a:t>탐지 · 금지로 푸는 방식은 한계에 부딪혔다.</a:t>
                       </a:r>
                     </a:p>
                     <a:p>
@@ -1876,7 +1894,7 @@
                         </a:spcAft>
                       </a:pPr>
                       <a:r>
-                        <a:rPr sz="950" b="0">
+                        <a:rPr sz="900" b="0">
                           <a:solidFill>
                             <a:srgbClr val="182E43"/>
                           </a:solidFill>
@@ -1884,7 +1902,7 @@
                           <a:ea typeface="Noto Sans CJK KR"/>
                           <a:cs typeface="Noto Sans CJK KR"/>
                         </a:rPr>
-                        <a:t>‘탐지로 푸는 방식’ 이 이미 한계에 부딪혔다</a:t>
+                        <a:t>과정을 남기는 접근이 따로 필요하다</a:t>
                       </a:r>
                     </a:p>
                   </a:txBody>
@@ -2006,7 +2024,7 @@
                           <a:ea typeface="Noto Sans CJK KR"/>
                           <a:cs typeface="Noto Sans CJK KR"/>
                         </a:rPr>
-                        <a:t>커미션 작가 · 학생 인터뷰 8~10명 진행 예정</a:t>
+                        <a:t>학생 · 교강사 인터뷰 8~10명 진행 예정</a:t>
                       </a:r>
                     </a:p>
                   </a:txBody>
@@ -2027,7 +2045,7 @@
                         </a:spcAft>
                       </a:pPr>
                       <a:r>
-                        <a:rPr sz="950" b="0" dirty="0" err="1">
+                        <a:rPr sz="900" b="0" dirty="0" err="1">
                           <a:solidFill>
                             <a:srgbClr val="182E43"/>
                           </a:solidFill>
@@ -2035,7 +2053,7 @@
                           <a:ea typeface="Noto Sans CJK KR"/>
                           <a:cs typeface="Noto Sans CJK KR"/>
                         </a:rPr>
-                        <a:t>교육 현장에 실제 수요가 있음을 확인.</a:t>
+                        <a:t>교육 현장의 문제로 확인.</a:t>
                       </a:r>
                       <a:endParaRPr sz="1725" b="0" dirty="0">
                         <a:solidFill>
@@ -2053,7 +2071,7 @@
                         </a:spcAft>
                       </a:pPr>
                       <a:r>
-                        <a:rPr sz="950" b="0" dirty="0" err="1">
+                        <a:rPr sz="900" b="0" dirty="0" err="1">
                           <a:solidFill>
                             <a:srgbClr val="182E43"/>
                           </a:solidFill>
@@ -2061,7 +2079,25 @@
                           <a:ea typeface="Noto Sans CJK KR"/>
                           <a:cs typeface="Noto Sans CJK KR"/>
                         </a:rPr>
-                        <a:t>작가군의 수요는 아직 미검증 (팀의 가설)</a:t>
+                        <a:t>‘과정에 대한 가치’ 가 핵심이라는 지적</a:t>
+                      </a:r>
+                    </a:p>
+                    <a:p>
+                      <a:pPr>
+                        <a:spcAft>
+                          <a:spcPts val="100"/>
+                        </a:spcAft>
+                      </a:pPr>
+                      <a:r>
+                        <a:rPr sz="900" b="0" dirty="0" err="1">
+                          <a:solidFill>
+                            <a:srgbClr val="182E43"/>
+                          </a:solidFill>
+                          <a:latin typeface="Noto Sans CJK KR"/>
+                          <a:ea typeface="Noto Sans CJK KR"/>
+                          <a:cs typeface="Noto Sans CJK KR"/>
+                        </a:rPr>
+                        <a:t>(학습자 측은 아직 미검증)</a:t>
                       </a:r>
                     </a:p>
                   </a:txBody>
@@ -2185,7 +2221,7 @@
               </a:defRPr>
             </a:pPr>
             <a:r>
-              <a:rPr sz="1900" b="1">
+              <a:rPr sz="1750" b="1">
                 <a:solidFill>
                   <a:srgbClr val="182E43"/>
                 </a:solidFill>
@@ -2193,7 +2229,7 @@
                 <a:ea typeface="Noto Sans CJK KR"/>
                 <a:cs typeface="Noto Sans CJK KR"/>
               </a:rPr>
-              <a:t>“컴퓨터로 결과물을 만들어 제출하는 사람은, 제출 이후 AI 사용을 의심받는 상황에서</a:t>
+              <a:t>“컴퓨터로 배우고 만드는 학습자와 이를 지도하는 교육자는, 학습이 끝난 뒤 그 과정을 돌아보려 할 때,</a:t>
             </a:r>
           </a:p>
           <a:p>
@@ -2203,7 +2239,7 @@
               </a:spcAft>
             </a:pPr>
             <a:r>
-              <a:rPr sz="1900" b="1">
+              <a:rPr sz="1750" b="1">
                 <a:solidFill>
                   <a:srgbClr val="182E43"/>
                 </a:solidFill>
@@ -2211,7 +2247,7 @@
                 <a:ea typeface="Noto Sans CJK KR"/>
                 <a:cs typeface="Noto Sans CJK KR"/>
               </a:rPr>
-              <a:t>과정 기록이 본인 기기에만 남고 언제든 고칠 수 있다는 제약 때문에, 결백을 보일 수 없다.”</a:t>
+              <a:t>결과물만 남고 과정은 기록되지 않기 때문에, 무엇을 배웠고 어디서 막혔는지 확인할 수 없다.”</a:t>
             </a:r>
           </a:p>
         </p:txBody>
@@ -2271,7 +2307,7 @@
                 <a:ea typeface="Noto Sans CJK KR"/>
                 <a:cs typeface="Noto Sans CJK KR"/>
               </a:rPr>
-              <a:t>Liang, W. et al. (2023). GPT detectors are biased against non-native English writers. Patterns 4(7), Cell Press.   ·   Vanderbilt University (2023.08.16). Guidance on AI Detection and Why We’re Disabling Turnitin’s AI Detector. vanderbilt.edu/brightspace</a:t>
+              <a:t>MIT Media Lab (2025). Your Brain on ChatGPT: Accumulation of Cognitive Debt when Using an AI Assistant for Essay Writing Task. arXiv:2506.08872 — 54명 대상, 동료심사 전 공개본   ·   Vanderbilt University (2023.08.16). Guidance on AI Detection and Why We’re Disabling Turnitin’s AI Detector.</a:t>
             </a:r>
           </a:p>
           <a:p>
@@ -2289,7 +2325,7 @@
                 <a:ea typeface="Noto Sans CJK KR"/>
                 <a:cs typeface="Noto Sans CJK KR"/>
               </a:rPr>
-              <a:t>박재완 교수 인터뷰 (2026.09.16, 대면)   ·   통계 인용은 각 문헌의 조사 대상·기간을 그대로 따랐으며, 팀이 추가 가공한 수치는 없음</a:t>
+              <a:t>박재완 교수 인터뷰 (2026.09.16, 대면)   ·   통계는 각 문헌의 조사 대상·기간을 그대로 인용했으며, 팀이 추가 가공한 수치는 없음</a:t>
             </a:r>
           </a:p>
         </p:txBody>
@@ -2936,7 +2972,7 @@
                           <a:ea typeface="Noto Sans CJK KR"/>
                           <a:cs typeface="Noto Sans CJK KR"/>
                         </a:rPr>
-                        <a:t>Procreate 타임랩스 — 해당 앱으로 그리는 작가</a:t>
+                        <a:t>Google 문서 버전 기록 — 같은 문서를 쓰는 모든 사람</a:t>
                       </a:r>
                     </a:p>
                   </a:txBody>
@@ -2965,7 +3001,7 @@
                           <a:ea typeface="Noto Sans CJK KR"/>
                           <a:cs typeface="Noto Sans CJK KR"/>
                         </a:rPr>
-                        <a:t>셋 다 ‘특정 도구 안에서’ 만 동작한다. 여러 앱(문서 · 편집 · 코드)을</a:t>
+                        <a:t>앞 둘은 ‘특정 도구 안’ 에서만 동작한다. 버전 기록은 도구를 가리지 않지만</a:t>
                       </a:r>
                     </a:p>
                     <a:p>
@@ -2983,7 +3019,7 @@
                           <a:ea typeface="Noto Sans CJK KR"/>
                           <a:cs typeface="Noto Sans CJK KR"/>
                         </a:rPr>
-                        <a:t>오가며 만드는 우리 대상에는 그대로 적용되지 않는다</a:t>
+                        <a:t>글에만 해당한다. 여러 앱을 오가며 배우는 학습자에게는 셋 다 부족하다</a:t>
                       </a:r>
                     </a:p>
                   </a:txBody>
@@ -3043,7 +3079,7 @@
                           <a:ea typeface="Noto Sans CJK KR"/>
                           <a:cs typeface="Noto Sans CJK KR"/>
                         </a:rPr>
-                        <a:t>Authorship — 타이핑 · 붙여넣기 · AI 요청을 문장 단위로 구분해 색으로 표시하고 과정을 재생</a:t>
+                        <a:t>Authorship — 타이핑 · 붙여넣기 · AI 요청을 문장 단위로 구분해 표시하고 과정을 재생</a:t>
                       </a:r>
                     </a:p>
                     <a:p>
@@ -3061,7 +3097,7 @@
                           <a:ea typeface="Noto Sans CJK KR"/>
                           <a:cs typeface="Noto Sans CJK KR"/>
                         </a:rPr>
-                        <a:t>타임랩스 — 작업 화면을 영상으로 녹화</a:t>
+                        <a:t>버전 기록 — 저장 시점마다 문서 전체를 보관</a:t>
                       </a:r>
                     </a:p>
                   </a:txBody>
@@ -3090,7 +3126,7 @@
                           <a:ea typeface="Noto Sans CJK KR"/>
                           <a:cs typeface="Noto Sans CJK KR"/>
                         </a:rPr>
-                        <a:t>‘출처를 구분해 보여준다’ 는 방식은 유효하다. 우리는 이를 도구에</a:t>
+                        <a:t>‘출처를 구분해 보여준다’ 는 방식은 유효하다. 다만 셋 다 교육자에게</a:t>
                       </a:r>
                     </a:p>
                     <a:p>
@@ -3108,7 +3144,7 @@
                           <a:ea typeface="Noto Sans CJK KR"/>
                           <a:cs typeface="Noto Sans CJK KR"/>
                         </a:rPr>
-                        <a:t>상관없이 적용하고, 기록 자체의 위조 방지를 더한다</a:t>
+                        <a:t>보고하는 형태이고, 학습자가 스스로 돌아보는 화면은 없다</a:t>
                       </a:r>
                     </a:p>
                   </a:txBody>
@@ -3168,7 +3204,7 @@
                           <a:ea typeface="Noto Sans CJK KR"/>
                           <a:cs typeface="Noto Sans CJK KR"/>
                         </a:rPr>
-                        <a:t>Authorship — 자기 에디터 밖의 작업은 보지 못하고, 기록을 봉인하는 장치가 없다</a:t>
+                        <a:t>Authorship — 자기 에디터 밖은 보지 못하고 기록을 봉인하는 장치가 없다</a:t>
                       </a:r>
                     </a:p>
                     <a:p>
@@ -3186,7 +3222,7 @@
                           <a:ea typeface="Noto Sans CJK KR"/>
                           <a:cs typeface="Noto Sans CJK KR"/>
                         </a:rPr>
-                        <a:t>타임랩스 — “그것도 만들 수 있다”는 반론에 무력</a:t>
+                        <a:t>버전 기록 — 남아는 있으나 읽을 수 있는 형태가 아니어서 실제로 회고에 쓰이지 않는다</a:t>
                       </a:r>
                     </a:p>
                   </a:txBody>
@@ -3215,7 +3251,7 @@
                           <a:ea typeface="Noto Sans CJK KR"/>
                           <a:cs typeface="Noto Sans CJK KR"/>
                         </a:rPr>
-                        <a:t>미해결 문제 = ① 도구를 가리지 않는 수집  ② 만든 사람도 나중에</a:t>
+                        <a:t>미해결 문제 = ① 도구를 가리지 않는 수집  ② 학습자 본인이 돌아볼 수 있는 형태</a:t>
                       </a:r>
                     </a:p>
                     <a:p>
@@ -3233,7 +3269,7 @@
                           <a:ea typeface="Noto Sans CJK KR"/>
                           <a:cs typeface="Noto Sans CJK KR"/>
                         </a:rPr>
-                        <a:t>고칠 수 없는 기록  ③ 제3자가 30초 안에 확인하는 화면</a:t>
+                        <a:t>③ 필요할 때만 제3자에게 보이는, 고칠 수 없는 기록</a:t>
                       </a:r>
                     </a:p>
                   </a:txBody>
@@ -3300,7 +3336,7 @@
               </a:defRPr>
             </a:pPr>
             <a:r>
-              <a:rPr sz="1600" b="1">
+              <a:rPr sz="1550" b="1">
                 <a:solidFill>
                   <a:srgbClr val="007E87"/>
                 </a:solidFill>
@@ -3308,7 +3344,7 @@
                 <a:ea typeface="Noto Sans CJK KR"/>
                 <a:cs typeface="Noto Sans CJK KR"/>
               </a:rPr>
-              <a:t>차별점:  “기존 사례는 자기 도구 안의 글만 다루고 기록의 위조를 막지 못하므로,</a:t>
+              <a:t>차별점:  “기존 사례는 기록을 남기더라도 학습자가 되돌아볼 형태로 주지 않으므로,</a:t>
             </a:r>
           </a:p>
           <a:p>
@@ -3318,7 +3354,7 @@
               </a:spcAft>
             </a:pPr>
             <a:r>
-              <a:rPr sz="1600" b="1">
+              <a:rPr sz="1550" b="1">
                 <a:solidFill>
                   <a:srgbClr val="007E87"/>
                 </a:solidFill>
@@ -3326,7 +3362,7 @@
                 <a:ea typeface="Noto Sans CJK KR"/>
                 <a:cs typeface="Noto Sans CJK KR"/>
               </a:rPr>
-              <a:t>우리는 도구에 상관없이 과정을 수집하고 해시 체인으로 봉인해 제3자가 확인하는 방식을 제안한다.”</a:t>
+              <a:t>우리는 도구에 상관없이 과정을 모아 스스로 회고하게 하고, 필요할 때만 봉인해 증명하는 방식을 제안한다.”</a:t>
             </a:r>
           </a:p>
         </p:txBody>
@@ -3509,7 +3545,7 @@
                 <a:ea typeface="Noto Sans CJK KR"/>
                 <a:cs typeface="Noto Sans CJK KR"/>
               </a:rPr>
-              <a:t>RQ1 ·  해시 체인으로 봉인한 과정 기록은, 타임랩스 · 초안 제출보다</a:t>
+              <a:t>RQ1 ·  과정 기록을 되돌아보게 하면, 학습자가 자신이 막혔던 지점을</a:t>
             </a:r>
             <a:endParaRPr sz="2175" b="0" dirty="0">
               <a:solidFill>
@@ -3535,7 +3571,7 @@
                 <a:ea typeface="Noto Sans CJK KR"/>
                 <a:cs typeface="Noto Sans CJK KR"/>
               </a:rPr>
-              <a:t>          검증자가 제작 과정을 더 신뢰하게 만드는가?</a:t>
+              <a:t>          결과물만 볼 때보다 더 많이 찾아내는가?  (Learn)</a:t>
             </a:r>
           </a:p>
           <a:p>
@@ -3553,7 +3589,7 @@
                 <a:ea typeface="Noto Sans CJK KR"/>
                 <a:cs typeface="Noto Sans CJK KR"/>
               </a:rPr>
-              <a:t>RQ2 ·  앱 전환 · 클립보드 · 파일 변화만으로, 외부에서 들어온 분량과</a:t>
+              <a:t>RQ2 ·  앱 전환 · 클립보드 · 파일 변화만으로, 어디서 막혀 AI 로 넘어갔는지를</a:t>
             </a:r>
           </a:p>
           <a:p>
@@ -3571,7 +3607,7 @@
                 <a:ea typeface="Noto Sans CJK KR"/>
                 <a:cs typeface="Noto Sans CJK KR"/>
               </a:rPr>
-              <a:t>          시점을 앱 종류와 무관하게 식별할 수 있는가?</a:t>
+              <a:t>          도구와 무관하게 식별할 수 있는가?  (수집)</a:t>
             </a:r>
           </a:p>
           <a:p>
@@ -3589,7 +3625,7 @@
                 <a:ea typeface="Noto Sans CJK KR"/>
                 <a:cs typeface="Noto Sans CJK KR"/>
               </a:rPr>
-              <a:t>RQ3 ·  ‘AI 이후의 편집량’ 을 함께 보여주면, 교수가 과제의 학습 과정을</a:t>
+              <a:t>RQ3 ·  과정 기록을 함께 제출하면, 교육자가 학습이 일어난 지점을</a:t>
             </a:r>
           </a:p>
           <a:p>
@@ -3607,7 +3643,7 @@
                 <a:ea typeface="Noto Sans CJK KR"/>
                 <a:cs typeface="Noto Sans CJK KR"/>
               </a:rPr>
-              <a:t>          결과물만 볼 때보다 더 정확히 판단하는가?</a:t>
+              <a:t>          결과물만 볼 때보다 더 정확히 판단하는가?  (Proof)</a:t>
             </a:r>
           </a:p>
         </p:txBody>
@@ -3724,7 +3760,7 @@
                 <a:ea typeface="Noto Sans CJK KR"/>
                 <a:cs typeface="Noto Sans CJK KR"/>
               </a:rPr>
-              <a:t>RQ1  지표 — 검증자가 ‘믿을 수 있다’고 답한 비율 · 결론까지 걸린 시간</a:t>
+              <a:t>RQ1  지표 — 회고에서 지목한 ‘막힌 지점’ 수 · 실제 기록과의 일치율</a:t>
             </a:r>
             <a:endParaRPr sz="1800" b="0" dirty="0">
               <a:solidFill>
@@ -3750,7 +3786,7 @@
                 <a:ea typeface="Noto Sans CJK KR"/>
                 <a:cs typeface="Noto Sans CJK KR"/>
               </a:rPr>
-              <a:t>          방법 — 같은 결과물을 타임랩스본 / 증명서본으로 나눠 제3자 10명에게 제시·비교</a:t>
+              <a:t>          방법 — 같은 학생 20명에게 기록 없이 회고 / 기록 보며 회고를 교차 실시</a:t>
             </a:r>
           </a:p>
           <a:p>
@@ -3804,7 +3840,7 @@
                 <a:ea typeface="Noto Sans CJK KR"/>
                 <a:cs typeface="Noto Sans CJK KR"/>
               </a:rPr>
-              <a:t>RQ3  지표 — 교수의 판단과 실제 작성 방식의 일치율</a:t>
+              <a:t>RQ3  지표 — 교육자의 판단과 실제 작성 과정의 일치율</a:t>
             </a:r>
           </a:p>
           <a:p>
@@ -3882,7 +3918,7 @@
                 <a:ea typeface="Noto Sans CJK KR"/>
                 <a:cs typeface="Noto Sans CJK KR"/>
               </a:rPr>
-              <a:t>출처: Grammarly Authorship (grammarly.com/authorship) · Turnitin Clarity · Procreate 타임랩스 — 각 제품의 공개 문서 기준.</a:t>
+              <a:t>출처: Grammarly Authorship (grammarly.com/authorship) · Turnitin Clarity · Google 문서 버전 기록 — 각 제품의 공개 문서 기준.</a:t>
             </a:r>
           </a:p>
           <a:p>
@@ -3900,7 +3936,7 @@
                 <a:ea typeface="Noto Sans CJK KR"/>
                 <a:cs typeface="Noto Sans CJK KR"/>
               </a:rPr>
-              <a:t>‘기록 위조 방지가 없다’ 는 공개 문서에 서명 · 재검증 기능이 없다는 점에 근거한 팀의 판단이며, 별도 실험으로 확인한 사실은 아님.</a:t>
+              <a:t>‘학습자용 회고 화면이 없다’ · ‘기록 봉인 장치가 없다’ 는 공개 문서에 해당 기능이 없다는 점에 근거한 팀의 판단이며, 별도 실험으로 확인한 사실은 아님.</a:t>
             </a:r>
           </a:p>
         </p:txBody>
@@ -4411,7 +4447,7 @@
                 <a:ea typeface="Noto Sans CJK KR"/>
                 <a:cs typeface="Noto Sans CJK KR"/>
               </a:rPr>
-              <a:t>컴퓨터로 결과물을 만드는 사람에게, 쓰던 도구를 바꾸지 않고 제작 과정을 남겨 “이 기록은 만든 뒤 고쳐지지 않았다”를 제3자에게 보인다.</a:t>
+              <a:t>컴퓨터로 배우고 만드는 사람에게, 쓰던 도구를 바꾸지 않고 과정을 남겨 ① 스스로 돌아보고 ② 필요할 때만 제3자에게 보일 수 있게 한다.</a:t>
             </a:r>
           </a:p>
           <a:p>
@@ -4429,7 +4465,7 @@
                 <a:ea typeface="Noto Sans CJK KR"/>
                 <a:cs typeface="Noto Sans CJK KR"/>
               </a:rPr>
-              <a:t>핵심 기능  ① 도구를 가리지 않는 과정 수집 (RQ2)   ② 해시 체인 봉인과 재검증 (RQ1)   ③ 외부 유입 이후의 편집량 표시 (RQ3)</a:t>
+              <a:t>핵심 기능  ① Learn — 과정 회고 화면 (RQ1)   ② 도구를 가리지 않는 수집 (RQ2)   ③ Proof — 해시 체인 봉인과 증명 (RQ3)</a:t>
             </a:r>
           </a:p>
         </p:txBody>
@@ -4546,7 +4582,7 @@
                 <a:ea typeface="Noto Sans CJK KR"/>
                 <a:cs typeface="Noto Sans CJK KR"/>
               </a:rPr>
-              <a:t>창작자는 쓰던 도구에서 그대로 작업하고, 수집기는 앱 · 파일 · 클립보드의 변화만 관측해 해시로 바꿔 서버에 보낸다.</a:t>
+              <a:t>학습자는 쓰던 도구에서 그대로 작업하고, 수집기는 앱 · 파일 · 클립보드의 변화만 관측해 해시로 바꿔 서버에 보낸다. 내용 자체는 전송하지 않는다.</a:t>
             </a:r>
           </a:p>
           <a:p>
@@ -4564,7 +4600,7 @@
                 <a:ea typeface="Noto Sans CJK KR"/>
                 <a:cs typeface="Noto Sans CJK KR"/>
               </a:rPr>
-              <a:t>내용 자체는 전송하지 않는다. 검증자는 공유 링크로 들어와, 저장된 재료로 다시 계산한 값과 파일에 적힌 값을 비교한다.</a:t>
+              <a:t>Learn 은 본인만 보는 회고 화면이고, Proof 는 봉인해 공유하는 증명 화면이다. 교육자는 Proof 를 열어 다시 계산한 값과 파일의 값을 비교한다.</a:t>
             </a:r>
           </a:p>
         </p:txBody>
@@ -4628,7 +4664,7 @@
                 <a:ea typeface="Noto Sans CJK KR"/>
                 <a:cs typeface="Noto Sans CJK KR"/>
               </a:rPr>
-              <a:t>창작자</a:t>
+              <a:t>학습자 · 교육자</a:t>
             </a:r>
           </a:p>
           <a:p>
@@ -4646,7 +4682,7 @@
                 <a:ea typeface="Noto Sans CJK KR"/>
                 <a:cs typeface="Noto Sans CJK KR"/>
               </a:rPr>
-              <a:t>쓰던 도구에서 작업</a:t>
+              <a:t>쓰던 도구에서 작업 · 열람</a:t>
             </a:r>
           </a:p>
         </p:txBody>
@@ -4792,7 +4828,7 @@
                 <a:ea typeface="Noto Sans CJK KR"/>
                 <a:cs typeface="Noto Sans CJK KR"/>
               </a:rPr>
-              <a:t>검증 서버 (Flask)</a:t>
+              <a:t>서버 (Flask)</a:t>
             </a:r>
           </a:p>
           <a:p>
@@ -4810,7 +4846,7 @@
                 <a:ea typeface="Noto Sans CJK KR"/>
                 <a:cs typeface="Noto Sans CJK KR"/>
               </a:rPr>
-              <a:t>해시 체인 계산 · 재검증</a:t>
+              <a:t>Learn 회고 · Proof 검증</a:t>
             </a:r>
           </a:p>
         </p:txBody>

--- a/deck/창의프로젝트_서비스계획수립_Trace.pptx
+++ b/deck/창의프로젝트_서비스계획수립_Trace.pptx
@@ -109,6 +109,11 @@
       </a:defRPr>
     </a:lvl9pPr>
   </p:defaultTextStyle>
+  <p:extLst>
+    <p:ext uri="{EFAFB233-063F-42B5-8137-9DF3F51BA10A}">
+      <p15:sldGuideLst xmlns:p15="http://schemas.microsoft.com/office/powerpoint/2012/main"/>
+    </p:ext>
+  </p:extLst>
 </p:presentation>
 </file>
 
@@ -921,7 +926,95 @@
                 <a:ea typeface="Noto Sans CJK KR"/>
                 <a:cs typeface="Noto Sans CJK KR"/>
               </a:rPr>
-              <a:t>창의프로젝트   서비스 계획 수립:  김용현 · [팀원 이름]</a:t>
+              <a:t>창의프로젝트</a:t>
+            </a:r>
+            <a:r>
+              <a:rPr sz="1575" b="1" dirty="0">
+                <a:solidFill>
+                  <a:srgbClr val="007E87"/>
+                </a:solidFill>
+                <a:latin typeface="Noto Sans CJK KR"/>
+                <a:ea typeface="Noto Sans CJK KR"/>
+                <a:cs typeface="Noto Sans CJK KR"/>
+              </a:rPr>
+              <a:t>   </a:t>
+            </a:r>
+            <a:r>
+              <a:rPr sz="1575" b="1" dirty="0" err="1">
+                <a:solidFill>
+                  <a:srgbClr val="007E87"/>
+                </a:solidFill>
+                <a:latin typeface="Noto Sans CJK KR"/>
+                <a:ea typeface="Noto Sans CJK KR"/>
+                <a:cs typeface="Noto Sans CJK KR"/>
+              </a:rPr>
+              <a:t>서비스</a:t>
+            </a:r>
+            <a:r>
+              <a:rPr sz="1575" b="1" dirty="0">
+                <a:solidFill>
+                  <a:srgbClr val="007E87"/>
+                </a:solidFill>
+                <a:latin typeface="Noto Sans CJK KR"/>
+                <a:ea typeface="Noto Sans CJK KR"/>
+                <a:cs typeface="Noto Sans CJK KR"/>
+              </a:rPr>
+              <a:t> </a:t>
+            </a:r>
+            <a:r>
+              <a:rPr sz="1575" b="1" dirty="0" err="1">
+                <a:solidFill>
+                  <a:srgbClr val="007E87"/>
+                </a:solidFill>
+                <a:latin typeface="Noto Sans CJK KR"/>
+                <a:ea typeface="Noto Sans CJK KR"/>
+                <a:cs typeface="Noto Sans CJK KR"/>
+              </a:rPr>
+              <a:t>계획</a:t>
+            </a:r>
+            <a:r>
+              <a:rPr sz="1575" b="1" dirty="0">
+                <a:solidFill>
+                  <a:srgbClr val="007E87"/>
+                </a:solidFill>
+                <a:latin typeface="Noto Sans CJK KR"/>
+                <a:ea typeface="Noto Sans CJK KR"/>
+                <a:cs typeface="Noto Sans CJK KR"/>
+              </a:rPr>
+              <a:t> </a:t>
+            </a:r>
+            <a:r>
+              <a:rPr sz="1575" b="1" dirty="0" err="1">
+                <a:solidFill>
+                  <a:srgbClr val="007E87"/>
+                </a:solidFill>
+                <a:latin typeface="Noto Sans CJK KR"/>
+                <a:ea typeface="Noto Sans CJK KR"/>
+                <a:cs typeface="Noto Sans CJK KR"/>
+              </a:rPr>
+              <a:t>수립</a:t>
+            </a:r>
+            <a:r>
+              <a:rPr sz="1575" b="1" dirty="0">
+                <a:solidFill>
+                  <a:srgbClr val="007E87"/>
+                </a:solidFill>
+                <a:latin typeface="Noto Sans CJK KR"/>
+                <a:ea typeface="Noto Sans CJK KR"/>
+                <a:cs typeface="Noto Sans CJK KR"/>
+              </a:rPr>
+              <a:t>:  김용현 · </a:t>
+            </a:r>
+            <a:r>
+              <a:rPr lang="ko-KR" altLang="en-US" sz="1575" b="1" dirty="0">
+                <a:solidFill>
+                  <a:srgbClr val="007E87"/>
+                </a:solidFill>
+                <a:latin typeface="Noto Sans CJK KR"/>
+                <a:ea typeface="Noto Sans CJK KR"/>
+                <a:cs typeface="Noto Sans CJK KR"/>
+              </a:rPr>
+              <a:t>박상진</a:t>
             </a:r>
             <a:endParaRPr sz="1575" b="1" dirty="0">
               <a:solidFill>
@@ -1677,7 +1770,7 @@
                 </a:tc>
                 <a:tc>
                   <a:txBody>
-                    <a:bodyPr wrap="square"/>
+                    <a:bodyPr/>
                     <a:lstStyle/>
                     <a:p>
                       <a:pPr>
@@ -1724,7 +1817,7 @@
                 </a:tc>
                 <a:tc>
                   <a:txBody>
-                    <a:bodyPr wrap="square"/>
+                    <a:bodyPr/>
                     <a:lstStyle/>
                     <a:p>
                       <a:pPr>
@@ -1820,7 +1913,7 @@
                 </a:tc>
                 <a:tc>
                   <a:txBody>
-                    <a:bodyPr wrap="square"/>
+                    <a:bodyPr/>
                     <a:lstStyle/>
                     <a:p>
                       <a:pPr>
@@ -1867,7 +1960,7 @@
                 </a:tc>
                 <a:tc>
                   <a:txBody>
-                    <a:bodyPr wrap="square"/>
+                    <a:bodyPr/>
                     <a:lstStyle/>
                     <a:p>
                       <a:pPr>
@@ -1989,7 +2082,7 @@
                 </a:tc>
                 <a:tc>
                   <a:txBody>
-                    <a:bodyPr wrap="square"/>
+                    <a:bodyPr/>
                     <a:lstStyle/>
                     <a:p>
                       <a:pPr>
@@ -2036,7 +2129,7 @@
                 </a:tc>
                 <a:tc>
                   <a:txBody>
-                    <a:bodyPr wrap="square"/>
+                    <a:bodyPr/>
                     <a:lstStyle/>
                     <a:p>
                       <a:pPr>
@@ -2423,7 +2516,95 @@
                 <a:ea typeface="Noto Sans CJK KR"/>
                 <a:cs typeface="Noto Sans CJK KR"/>
               </a:rPr>
-              <a:t>창의프로젝트   서비스 계획 수립:  김용현 · [팀원 이름]</a:t>
+              <a:t>창의프로젝트</a:t>
+            </a:r>
+            <a:r>
+              <a:rPr sz="1575" b="1" dirty="0">
+                <a:solidFill>
+                  <a:srgbClr val="007E87"/>
+                </a:solidFill>
+                <a:latin typeface="Noto Sans CJK KR"/>
+                <a:ea typeface="Noto Sans CJK KR"/>
+                <a:cs typeface="Noto Sans CJK KR"/>
+              </a:rPr>
+              <a:t>   </a:t>
+            </a:r>
+            <a:r>
+              <a:rPr sz="1575" b="1" dirty="0" err="1">
+                <a:solidFill>
+                  <a:srgbClr val="007E87"/>
+                </a:solidFill>
+                <a:latin typeface="Noto Sans CJK KR"/>
+                <a:ea typeface="Noto Sans CJK KR"/>
+                <a:cs typeface="Noto Sans CJK KR"/>
+              </a:rPr>
+              <a:t>서비스</a:t>
+            </a:r>
+            <a:r>
+              <a:rPr sz="1575" b="1" dirty="0">
+                <a:solidFill>
+                  <a:srgbClr val="007E87"/>
+                </a:solidFill>
+                <a:latin typeface="Noto Sans CJK KR"/>
+                <a:ea typeface="Noto Sans CJK KR"/>
+                <a:cs typeface="Noto Sans CJK KR"/>
+              </a:rPr>
+              <a:t> </a:t>
+            </a:r>
+            <a:r>
+              <a:rPr sz="1575" b="1" dirty="0" err="1">
+                <a:solidFill>
+                  <a:srgbClr val="007E87"/>
+                </a:solidFill>
+                <a:latin typeface="Noto Sans CJK KR"/>
+                <a:ea typeface="Noto Sans CJK KR"/>
+                <a:cs typeface="Noto Sans CJK KR"/>
+              </a:rPr>
+              <a:t>계획</a:t>
+            </a:r>
+            <a:r>
+              <a:rPr sz="1575" b="1" dirty="0">
+                <a:solidFill>
+                  <a:srgbClr val="007E87"/>
+                </a:solidFill>
+                <a:latin typeface="Noto Sans CJK KR"/>
+                <a:ea typeface="Noto Sans CJK KR"/>
+                <a:cs typeface="Noto Sans CJK KR"/>
+              </a:rPr>
+              <a:t> </a:t>
+            </a:r>
+            <a:r>
+              <a:rPr sz="1575" b="1" dirty="0" err="1">
+                <a:solidFill>
+                  <a:srgbClr val="007E87"/>
+                </a:solidFill>
+                <a:latin typeface="Noto Sans CJK KR"/>
+                <a:ea typeface="Noto Sans CJK KR"/>
+                <a:cs typeface="Noto Sans CJK KR"/>
+              </a:rPr>
+              <a:t>수립</a:t>
+            </a:r>
+            <a:r>
+              <a:rPr sz="1575" b="1" dirty="0">
+                <a:solidFill>
+                  <a:srgbClr val="007E87"/>
+                </a:solidFill>
+                <a:latin typeface="Noto Sans CJK KR"/>
+                <a:ea typeface="Noto Sans CJK KR"/>
+                <a:cs typeface="Noto Sans CJK KR"/>
+              </a:rPr>
+              <a:t>:  김용현 · </a:t>
+            </a:r>
+            <a:r>
+              <a:rPr lang="ko-KR" altLang="en-US" sz="1575" b="1" dirty="0">
+                <a:solidFill>
+                  <a:srgbClr val="007E87"/>
+                </a:solidFill>
+                <a:latin typeface="Noto Sans CJK KR"/>
+                <a:ea typeface="Noto Sans CJK KR"/>
+                <a:cs typeface="Noto Sans CJK KR"/>
+              </a:rPr>
+              <a:t>박상진</a:t>
             </a:r>
             <a:endParaRPr sz="1575" b="1" dirty="0">
               <a:solidFill>
@@ -2937,7 +3118,7 @@
                 </a:tc>
                 <a:tc>
                   <a:txBody>
-                    <a:bodyPr wrap="square"/>
+                    <a:bodyPr/>
                     <a:lstStyle/>
                     <a:p>
                       <a:pPr>
@@ -2984,7 +3165,7 @@
                 </a:tc>
                 <a:tc>
                   <a:txBody>
-                    <a:bodyPr wrap="square"/>
+                    <a:bodyPr/>
                     <a:lstStyle/>
                     <a:p>
                       <a:pPr>
@@ -3062,7 +3243,7 @@
                 </a:tc>
                 <a:tc>
                   <a:txBody>
-                    <a:bodyPr wrap="square"/>
+                    <a:bodyPr/>
                     <a:lstStyle/>
                     <a:p>
                       <a:pPr>
@@ -3109,7 +3290,7 @@
                 </a:tc>
                 <a:tc>
                   <a:txBody>
-                    <a:bodyPr wrap="square"/>
+                    <a:bodyPr/>
                     <a:lstStyle/>
                     <a:p>
                       <a:pPr>
@@ -3187,7 +3368,7 @@
                 </a:tc>
                 <a:tc>
                   <a:txBody>
-                    <a:bodyPr wrap="square"/>
+                    <a:bodyPr/>
                     <a:lstStyle/>
                     <a:p>
                       <a:pPr>
@@ -3234,7 +3415,7 @@
                 </a:tc>
                 <a:tc>
                   <a:txBody>
-                    <a:bodyPr wrap="square"/>
+                    <a:bodyPr/>
                     <a:lstStyle/>
                     <a:p>
                       <a:pPr>
@@ -3419,7 +3600,7 @@
                 <a:ea typeface="Noto Sans CJK KR"/>
                 <a:cs typeface="Noto Sans CJK KR"/>
               </a:rPr>
-              <a:t>구체적인 해결안을 도출을 </a:t>
+              <a:t>구체적인 해결안을 도출할 </a:t>
             </a:r>
             <a:r>
               <a:rPr sz="2250" b="1" dirty="0" err="1">
@@ -3692,16 +3873,112 @@
               </a:defRPr>
             </a:pPr>
             <a:r>
-              <a:rPr sz="2250" b="1">
-                <a:solidFill>
-                  <a:srgbClr val="182E43"/>
-                </a:solidFill>
-                <a:latin typeface="Noto Sans CJK KR"/>
-                <a:ea typeface="Noto Sans CJK KR"/>
-                <a:cs typeface="Noto Sans CJK KR"/>
-              </a:rPr>
-              <a:t>질문마다 검증 지표와 방법 제시</a:t>
-            </a:r>
+              <a:rPr sz="2250" b="1" dirty="0" err="1">
+                <a:solidFill>
+                  <a:srgbClr val="182E43"/>
+                </a:solidFill>
+                <a:latin typeface="Noto Sans CJK KR"/>
+                <a:ea typeface="Noto Sans CJK KR"/>
+                <a:cs typeface="Noto Sans CJK KR"/>
+              </a:rPr>
+              <a:t>질문마다</a:t>
+            </a:r>
+            <a:r>
+              <a:rPr sz="2250" b="1" dirty="0">
+                <a:solidFill>
+                  <a:srgbClr val="182E43"/>
+                </a:solidFill>
+                <a:latin typeface="Noto Sans CJK KR"/>
+                <a:ea typeface="Noto Sans CJK KR"/>
+                <a:cs typeface="Noto Sans CJK KR"/>
+              </a:rPr>
+              <a:t> </a:t>
+            </a:r>
+            <a:r>
+              <a:rPr sz="2250" b="1" dirty="0" err="1">
+                <a:solidFill>
+                  <a:srgbClr val="182E43"/>
+                </a:solidFill>
+                <a:latin typeface="Noto Sans CJK KR"/>
+                <a:ea typeface="Noto Sans CJK KR"/>
+                <a:cs typeface="Noto Sans CJK KR"/>
+              </a:rPr>
+              <a:t>검증</a:t>
+            </a:r>
+            <a:r>
+              <a:rPr sz="2250" b="1" dirty="0">
+                <a:solidFill>
+                  <a:srgbClr val="182E43"/>
+                </a:solidFill>
+                <a:latin typeface="Noto Sans CJK KR"/>
+                <a:ea typeface="Noto Sans CJK KR"/>
+                <a:cs typeface="Noto Sans CJK KR"/>
+              </a:rPr>
+              <a:t> </a:t>
+            </a:r>
+            <a:r>
+              <a:rPr sz="2250" b="1" dirty="0" err="1">
+                <a:solidFill>
+                  <a:srgbClr val="182E43"/>
+                </a:solidFill>
+                <a:latin typeface="Noto Sans CJK KR"/>
+                <a:ea typeface="Noto Sans CJK KR"/>
+                <a:cs typeface="Noto Sans CJK KR"/>
+              </a:rPr>
+              <a:t>지표와</a:t>
+            </a:r>
+            <a:r>
+              <a:rPr sz="2250" b="1" dirty="0">
+                <a:solidFill>
+                  <a:srgbClr val="182E43"/>
+                </a:solidFill>
+                <a:latin typeface="Noto Sans CJK KR"/>
+                <a:ea typeface="Noto Sans CJK KR"/>
+                <a:cs typeface="Noto Sans CJK KR"/>
+              </a:rPr>
+              <a:t> </a:t>
+            </a:r>
+            <a:r>
+              <a:rPr sz="2250" b="1" dirty="0" err="1">
+                <a:solidFill>
+                  <a:srgbClr val="182E43"/>
+                </a:solidFill>
+                <a:latin typeface="Noto Sans CJK KR"/>
+                <a:ea typeface="Noto Sans CJK KR"/>
+                <a:cs typeface="Noto Sans CJK KR"/>
+              </a:rPr>
+              <a:t>방법</a:t>
+            </a:r>
+            <a:r>
+              <a:rPr sz="2250" b="1" dirty="0">
+                <a:solidFill>
+                  <a:srgbClr val="182E43"/>
+                </a:solidFill>
+                <a:latin typeface="Noto Sans CJK KR"/>
+                <a:ea typeface="Noto Sans CJK KR"/>
+                <a:cs typeface="Noto Sans CJK KR"/>
+              </a:rPr>
+              <a:t> </a:t>
+            </a:r>
+            <a:r>
+              <a:rPr sz="2250" b="1" dirty="0" err="1">
+                <a:solidFill>
+                  <a:srgbClr val="182E43"/>
+                </a:solidFill>
+                <a:latin typeface="Noto Sans CJK KR"/>
+                <a:ea typeface="Noto Sans CJK KR"/>
+                <a:cs typeface="Noto Sans CJK KR"/>
+              </a:rPr>
+              <a:t>제시</a:t>
+            </a:r>
+            <a:endParaRPr sz="2250" b="1" dirty="0">
+              <a:solidFill>
+                <a:srgbClr val="182E43"/>
+              </a:solidFill>
+              <a:latin typeface="Noto Sans CJK KR"/>
+              <a:ea typeface="Noto Sans CJK KR"/>
+              <a:cs typeface="Noto Sans CJK KR"/>
+            </a:endParaRPr>
           </a:p>
         </p:txBody>
       </p:sp>
@@ -4034,7 +4311,95 @@
                 <a:ea typeface="Noto Sans CJK KR"/>
                 <a:cs typeface="Noto Sans CJK KR"/>
               </a:rPr>
-              <a:t>창의프로젝트   서비스 계획 수립:  김용현 · [팀원 이름]</a:t>
+              <a:t>창의프로젝트</a:t>
+            </a:r>
+            <a:r>
+              <a:rPr sz="1575" b="1" dirty="0">
+                <a:solidFill>
+                  <a:srgbClr val="007E87"/>
+                </a:solidFill>
+                <a:latin typeface="Noto Sans CJK KR"/>
+                <a:ea typeface="Noto Sans CJK KR"/>
+                <a:cs typeface="Noto Sans CJK KR"/>
+              </a:rPr>
+              <a:t>   </a:t>
+            </a:r>
+            <a:r>
+              <a:rPr sz="1575" b="1" dirty="0" err="1">
+                <a:solidFill>
+                  <a:srgbClr val="007E87"/>
+                </a:solidFill>
+                <a:latin typeface="Noto Sans CJK KR"/>
+                <a:ea typeface="Noto Sans CJK KR"/>
+                <a:cs typeface="Noto Sans CJK KR"/>
+              </a:rPr>
+              <a:t>서비스</a:t>
+            </a:r>
+            <a:r>
+              <a:rPr sz="1575" b="1" dirty="0">
+                <a:solidFill>
+                  <a:srgbClr val="007E87"/>
+                </a:solidFill>
+                <a:latin typeface="Noto Sans CJK KR"/>
+                <a:ea typeface="Noto Sans CJK KR"/>
+                <a:cs typeface="Noto Sans CJK KR"/>
+              </a:rPr>
+              <a:t> </a:t>
+            </a:r>
+            <a:r>
+              <a:rPr sz="1575" b="1" dirty="0" err="1">
+                <a:solidFill>
+                  <a:srgbClr val="007E87"/>
+                </a:solidFill>
+                <a:latin typeface="Noto Sans CJK KR"/>
+                <a:ea typeface="Noto Sans CJK KR"/>
+                <a:cs typeface="Noto Sans CJK KR"/>
+              </a:rPr>
+              <a:t>계획</a:t>
+            </a:r>
+            <a:r>
+              <a:rPr sz="1575" b="1" dirty="0">
+                <a:solidFill>
+                  <a:srgbClr val="007E87"/>
+                </a:solidFill>
+                <a:latin typeface="Noto Sans CJK KR"/>
+                <a:ea typeface="Noto Sans CJK KR"/>
+                <a:cs typeface="Noto Sans CJK KR"/>
+              </a:rPr>
+              <a:t> </a:t>
+            </a:r>
+            <a:r>
+              <a:rPr sz="1575" b="1" dirty="0" err="1">
+                <a:solidFill>
+                  <a:srgbClr val="007E87"/>
+                </a:solidFill>
+                <a:latin typeface="Noto Sans CJK KR"/>
+                <a:ea typeface="Noto Sans CJK KR"/>
+                <a:cs typeface="Noto Sans CJK KR"/>
+              </a:rPr>
+              <a:t>수립</a:t>
+            </a:r>
+            <a:r>
+              <a:rPr sz="1575" b="1" dirty="0">
+                <a:solidFill>
+                  <a:srgbClr val="007E87"/>
+                </a:solidFill>
+                <a:latin typeface="Noto Sans CJK KR"/>
+                <a:ea typeface="Noto Sans CJK KR"/>
+                <a:cs typeface="Noto Sans CJK KR"/>
+              </a:rPr>
+              <a:t>:  김용현 · </a:t>
+            </a:r>
+            <a:r>
+              <a:rPr lang="ko-KR" altLang="en-US" sz="1575" b="1" dirty="0">
+                <a:solidFill>
+                  <a:srgbClr val="007E87"/>
+                </a:solidFill>
+                <a:latin typeface="Noto Sans CJK KR"/>
+                <a:ea typeface="Noto Sans CJK KR"/>
+                <a:cs typeface="Noto Sans CJK KR"/>
+              </a:rPr>
+              <a:t>박상진</a:t>
             </a:r>
             <a:endParaRPr sz="1575" b="1" dirty="0">
               <a:solidFill>
@@ -4091,16 +4456,134 @@
               </a:defRPr>
             </a:pPr>
             <a:r>
-              <a:rPr sz="3600" b="1">
-                <a:solidFill>
-                  <a:srgbClr val="182E43"/>
-                </a:solidFill>
-                <a:latin typeface="Noto Sans CJK KR"/>
-                <a:ea typeface="Noto Sans CJK KR"/>
-                <a:cs typeface="Noto Sans CJK KR"/>
-              </a:rPr>
-              <a:t>제안 서비스, 아키텍처와 핵심 기술 테스트</a:t>
-            </a:r>
+              <a:rPr sz="3600" b="1" dirty="0" err="1">
+                <a:solidFill>
+                  <a:srgbClr val="182E43"/>
+                </a:solidFill>
+                <a:latin typeface="Noto Sans CJK KR"/>
+                <a:ea typeface="Noto Sans CJK KR"/>
+                <a:cs typeface="Noto Sans CJK KR"/>
+              </a:rPr>
+              <a:t>제안</a:t>
+            </a:r>
+            <a:r>
+              <a:rPr sz="3600" b="1" dirty="0">
+                <a:solidFill>
+                  <a:srgbClr val="182E43"/>
+                </a:solidFill>
+                <a:latin typeface="Noto Sans CJK KR"/>
+                <a:ea typeface="Noto Sans CJK KR"/>
+                <a:cs typeface="Noto Sans CJK KR"/>
+              </a:rPr>
+              <a:t> </a:t>
+            </a:r>
+            <a:r>
+              <a:rPr sz="3600" b="1" dirty="0" err="1">
+                <a:solidFill>
+                  <a:srgbClr val="182E43"/>
+                </a:solidFill>
+                <a:latin typeface="Noto Sans CJK KR"/>
+                <a:ea typeface="Noto Sans CJK KR"/>
+                <a:cs typeface="Noto Sans CJK KR"/>
+              </a:rPr>
+              <a:t>서비스</a:t>
+            </a:r>
+            <a:r>
+              <a:rPr sz="3600" b="1" dirty="0">
+                <a:solidFill>
+                  <a:srgbClr val="182E43"/>
+                </a:solidFill>
+                <a:latin typeface="Noto Sans CJK KR"/>
+                <a:ea typeface="Noto Sans CJK KR"/>
+                <a:cs typeface="Noto Sans CJK KR"/>
+              </a:rPr>
+              <a:t>, </a:t>
+            </a:r>
+            <a:r>
+              <a:rPr sz="3600" b="1" dirty="0" err="1">
+                <a:solidFill>
+                  <a:srgbClr val="182E43"/>
+                </a:solidFill>
+                <a:latin typeface="Noto Sans CJK KR"/>
+                <a:ea typeface="Noto Sans CJK KR"/>
+                <a:cs typeface="Noto Sans CJK KR"/>
+              </a:rPr>
+              <a:t>아키텍처와</a:t>
+            </a:r>
+            <a:r>
+              <a:rPr sz="3600" b="1" dirty="0">
+                <a:solidFill>
+                  <a:srgbClr val="182E43"/>
+                </a:solidFill>
+                <a:latin typeface="Noto Sans CJK KR"/>
+                <a:ea typeface="Noto Sans CJK KR"/>
+                <a:cs typeface="Noto Sans CJK KR"/>
+              </a:rPr>
+              <a:t> </a:t>
+            </a:r>
+            <a:r>
+              <a:rPr sz="3600" b="1" dirty="0" err="1">
+                <a:solidFill>
+                  <a:srgbClr val="182E43"/>
+                </a:solidFill>
+                <a:latin typeface="Noto Sans CJK KR"/>
+                <a:ea typeface="Noto Sans CJK KR"/>
+                <a:cs typeface="Noto Sans CJK KR"/>
+              </a:rPr>
+              <a:t>핵심</a:t>
+            </a:r>
+            <a:r>
+              <a:rPr sz="3600" b="1" dirty="0">
+                <a:solidFill>
+                  <a:srgbClr val="182E43"/>
+                </a:solidFill>
+                <a:latin typeface="Noto Sans CJK KR"/>
+                <a:ea typeface="Noto Sans CJK KR"/>
+                <a:cs typeface="Noto Sans CJK KR"/>
+              </a:rPr>
+              <a:t> </a:t>
+            </a:r>
+            <a:r>
+              <a:rPr sz="3600" b="1" dirty="0" err="1">
+                <a:solidFill>
+                  <a:srgbClr val="182E43"/>
+                </a:solidFill>
+                <a:latin typeface="Noto Sans CJK KR"/>
+                <a:ea typeface="Noto Sans CJK KR"/>
+                <a:cs typeface="Noto Sans CJK KR"/>
+              </a:rPr>
+              <a:t>기술</a:t>
+            </a:r>
+            <a:r>
+              <a:rPr sz="3600" b="1" dirty="0">
+                <a:solidFill>
+                  <a:srgbClr val="182E43"/>
+                </a:solidFill>
+                <a:latin typeface="Noto Sans CJK KR"/>
+                <a:ea typeface="Noto Sans CJK KR"/>
+                <a:cs typeface="Noto Sans CJK KR"/>
+              </a:rPr>
+              <a:t> </a:t>
+            </a:r>
+            <a:r>
+              <a:rPr sz="3600" b="1" dirty="0" err="1">
+                <a:solidFill>
+                  <a:srgbClr val="182E43"/>
+                </a:solidFill>
+                <a:latin typeface="Noto Sans CJK KR"/>
+                <a:ea typeface="Noto Sans CJK KR"/>
+                <a:cs typeface="Noto Sans CJK KR"/>
+              </a:rPr>
+              <a:t>테스트</a:t>
+            </a:r>
+            <a:endParaRPr sz="3600" b="1" dirty="0">
+              <a:solidFill>
+                <a:srgbClr val="182E43"/>
+              </a:solidFill>
+              <a:latin typeface="Noto Sans CJK KR"/>
+              <a:ea typeface="Noto Sans CJK KR"/>
+              <a:cs typeface="Noto Sans CJK KR"/>
+            </a:endParaRPr>
           </a:p>
         </p:txBody>
       </p:sp>
@@ -4322,16 +4805,178 @@
               </a:defRPr>
             </a:pPr>
             <a:r>
-              <a:rPr sz="1600" b="0">
-                <a:solidFill>
-                  <a:srgbClr val="182E43"/>
-                </a:solidFill>
-                <a:latin typeface="Noto Sans CJK KR"/>
-                <a:ea typeface="Noto Sans CJK KR"/>
-                <a:cs typeface="Noto Sans CJK KR"/>
-              </a:rPr>
-              <a:t>PC 애플리케이션(상주 수집기) + 웹 서비스(검증 화면)   ·   이번 학기 프로토타입은 웹부터 구현</a:t>
-            </a:r>
+              <a:rPr sz="1600" b="0" dirty="0">
+                <a:solidFill>
+                  <a:srgbClr val="182E43"/>
+                </a:solidFill>
+                <a:latin typeface="Noto Sans CJK KR"/>
+                <a:ea typeface="Noto Sans CJK KR"/>
+                <a:cs typeface="Noto Sans CJK KR"/>
+              </a:rPr>
+              <a:t>PC </a:t>
+            </a:r>
+            <a:r>
+              <a:rPr sz="1600" b="0" dirty="0" err="1">
+                <a:solidFill>
+                  <a:srgbClr val="182E43"/>
+                </a:solidFill>
+                <a:latin typeface="Noto Sans CJK KR"/>
+                <a:ea typeface="Noto Sans CJK KR"/>
+                <a:cs typeface="Noto Sans CJK KR"/>
+              </a:rPr>
+              <a:t>애플리케이션</a:t>
+            </a:r>
+            <a:r>
+              <a:rPr sz="1600" b="0" dirty="0">
+                <a:solidFill>
+                  <a:srgbClr val="182E43"/>
+                </a:solidFill>
+                <a:latin typeface="Noto Sans CJK KR"/>
+                <a:ea typeface="Noto Sans CJK KR"/>
+                <a:cs typeface="Noto Sans CJK KR"/>
+              </a:rPr>
+              <a:t>(</a:t>
+            </a:r>
+            <a:r>
+              <a:rPr sz="1600" b="0" dirty="0" err="1">
+                <a:solidFill>
+                  <a:srgbClr val="182E43"/>
+                </a:solidFill>
+                <a:latin typeface="Noto Sans CJK KR"/>
+                <a:ea typeface="Noto Sans CJK KR"/>
+                <a:cs typeface="Noto Sans CJK KR"/>
+              </a:rPr>
+              <a:t>상주</a:t>
+            </a:r>
+            <a:r>
+              <a:rPr sz="1600" b="0" dirty="0">
+                <a:solidFill>
+                  <a:srgbClr val="182E43"/>
+                </a:solidFill>
+                <a:latin typeface="Noto Sans CJK KR"/>
+                <a:ea typeface="Noto Sans CJK KR"/>
+                <a:cs typeface="Noto Sans CJK KR"/>
+              </a:rPr>
+              <a:t> </a:t>
+            </a:r>
+            <a:r>
+              <a:rPr sz="1600" b="0" dirty="0" err="1">
+                <a:solidFill>
+                  <a:srgbClr val="182E43"/>
+                </a:solidFill>
+                <a:latin typeface="Noto Sans CJK KR"/>
+                <a:ea typeface="Noto Sans CJK KR"/>
+                <a:cs typeface="Noto Sans CJK KR"/>
+              </a:rPr>
+              <a:t>수집기</a:t>
+            </a:r>
+            <a:r>
+              <a:rPr sz="1600" b="0" dirty="0">
+                <a:solidFill>
+                  <a:srgbClr val="182E43"/>
+                </a:solidFill>
+                <a:latin typeface="Noto Sans CJK KR"/>
+                <a:ea typeface="Noto Sans CJK KR"/>
+                <a:cs typeface="Noto Sans CJK KR"/>
+              </a:rPr>
+              <a:t>) + </a:t>
+            </a:r>
+            <a:r>
+              <a:rPr sz="1600" b="0" dirty="0" err="1">
+                <a:solidFill>
+                  <a:srgbClr val="182E43"/>
+                </a:solidFill>
+                <a:latin typeface="Noto Sans CJK KR"/>
+                <a:ea typeface="Noto Sans CJK KR"/>
+                <a:cs typeface="Noto Sans CJK KR"/>
+              </a:rPr>
+              <a:t>웹</a:t>
+            </a:r>
+            <a:r>
+              <a:rPr sz="1600" b="0" dirty="0">
+                <a:solidFill>
+                  <a:srgbClr val="182E43"/>
+                </a:solidFill>
+                <a:latin typeface="Noto Sans CJK KR"/>
+                <a:ea typeface="Noto Sans CJK KR"/>
+                <a:cs typeface="Noto Sans CJK KR"/>
+              </a:rPr>
+              <a:t> </a:t>
+            </a:r>
+            <a:r>
+              <a:rPr sz="1600" b="0" dirty="0" err="1">
+                <a:solidFill>
+                  <a:srgbClr val="182E43"/>
+                </a:solidFill>
+                <a:latin typeface="Noto Sans CJK KR"/>
+                <a:ea typeface="Noto Sans CJK KR"/>
+                <a:cs typeface="Noto Sans CJK KR"/>
+              </a:rPr>
+              <a:t>서비스</a:t>
+            </a:r>
+            <a:r>
+              <a:rPr sz="1600" b="0" dirty="0">
+                <a:solidFill>
+                  <a:srgbClr val="182E43"/>
+                </a:solidFill>
+                <a:latin typeface="Noto Sans CJK KR"/>
+                <a:ea typeface="Noto Sans CJK KR"/>
+                <a:cs typeface="Noto Sans CJK KR"/>
+              </a:rPr>
+              <a:t>(</a:t>
+            </a:r>
+            <a:r>
+              <a:rPr sz="1600" b="0" dirty="0" err="1">
+                <a:solidFill>
+                  <a:srgbClr val="182E43"/>
+                </a:solidFill>
+                <a:latin typeface="Noto Sans CJK KR"/>
+                <a:ea typeface="Noto Sans CJK KR"/>
+                <a:cs typeface="Noto Sans CJK KR"/>
+              </a:rPr>
+              <a:t>검증</a:t>
+            </a:r>
+            <a:r>
+              <a:rPr sz="1600" b="0" dirty="0">
+                <a:solidFill>
+                  <a:srgbClr val="182E43"/>
+                </a:solidFill>
+                <a:latin typeface="Noto Sans CJK KR"/>
+                <a:ea typeface="Noto Sans CJK KR"/>
+                <a:cs typeface="Noto Sans CJK KR"/>
+              </a:rPr>
+              <a:t> </a:t>
+            </a:r>
+            <a:r>
+              <a:rPr sz="1600" b="0" dirty="0" err="1">
+                <a:solidFill>
+                  <a:srgbClr val="182E43"/>
+                </a:solidFill>
+                <a:latin typeface="Noto Sans CJK KR"/>
+                <a:ea typeface="Noto Sans CJK KR"/>
+                <a:cs typeface="Noto Sans CJK KR"/>
+              </a:rPr>
+              <a:t>화면</a:t>
+            </a:r>
+            <a:r>
+              <a:rPr lang="en-US" altLang="ko-KR" sz="1600" b="0" dirty="0">
+                <a:solidFill>
+                  <a:srgbClr val="182E43"/>
+                </a:solidFill>
+                <a:latin typeface="Noto Sans CJK KR"/>
+                <a:ea typeface="Noto Sans CJK KR"/>
+                <a:cs typeface="Noto Sans CJK KR"/>
+              </a:rPr>
+              <a:t>)</a:t>
+            </a:r>
+            <a:endParaRPr sz="1600" b="0" dirty="0">
+              <a:solidFill>
+                <a:srgbClr val="182E43"/>
+              </a:solidFill>
+              <a:latin typeface="Noto Sans CJK KR"/>
+              <a:ea typeface="Noto Sans CJK KR"/>
+              <a:cs typeface="Noto Sans CJK KR"/>
+            </a:endParaRPr>
           </a:p>
         </p:txBody>
       </p:sp>
@@ -4439,15 +5084,400 @@
               </a:defRPr>
             </a:pPr>
             <a:r>
-              <a:rPr sz="1350" b="0">
-                <a:solidFill>
-                  <a:srgbClr val="182E43"/>
-                </a:solidFill>
-                <a:latin typeface="Noto Sans CJK KR"/>
-                <a:ea typeface="Noto Sans CJK KR"/>
-                <a:cs typeface="Noto Sans CJK KR"/>
-              </a:rPr>
-              <a:t>컴퓨터로 배우고 만드는 사람에게, 쓰던 도구를 바꾸지 않고 과정을 남겨 ① 스스로 돌아보고 ② 필요할 때만 제3자에게 보일 수 있게 한다.</a:t>
+              <a:rPr sz="1350" b="0" dirty="0" err="1">
+                <a:solidFill>
+                  <a:srgbClr val="182E43"/>
+                </a:solidFill>
+                <a:latin typeface="Noto Sans CJK KR"/>
+                <a:ea typeface="Noto Sans CJK KR"/>
+                <a:cs typeface="Noto Sans CJK KR"/>
+              </a:rPr>
+              <a:t>컴퓨터로</a:t>
+            </a:r>
+            <a:r>
+              <a:rPr sz="1350" b="0" dirty="0">
+                <a:solidFill>
+                  <a:srgbClr val="182E43"/>
+                </a:solidFill>
+                <a:latin typeface="Noto Sans CJK KR"/>
+                <a:ea typeface="Noto Sans CJK KR"/>
+                <a:cs typeface="Noto Sans CJK KR"/>
+              </a:rPr>
+              <a:t> </a:t>
+            </a:r>
+            <a:r>
+              <a:rPr sz="1350" b="0" dirty="0" err="1">
+                <a:solidFill>
+                  <a:srgbClr val="182E43"/>
+                </a:solidFill>
+                <a:latin typeface="Noto Sans CJK KR"/>
+                <a:ea typeface="Noto Sans CJK KR"/>
+                <a:cs typeface="Noto Sans CJK KR"/>
+              </a:rPr>
+              <a:t>배우고</a:t>
+            </a:r>
+            <a:r>
+              <a:rPr sz="1350" b="0" dirty="0">
+                <a:solidFill>
+                  <a:srgbClr val="182E43"/>
+                </a:solidFill>
+                <a:latin typeface="Noto Sans CJK KR"/>
+                <a:ea typeface="Noto Sans CJK KR"/>
+                <a:cs typeface="Noto Sans CJK KR"/>
+              </a:rPr>
+              <a:t> </a:t>
+            </a:r>
+            <a:r>
+              <a:rPr sz="1350" b="0" dirty="0" err="1">
+                <a:solidFill>
+                  <a:srgbClr val="182E43"/>
+                </a:solidFill>
+                <a:latin typeface="Noto Sans CJK KR"/>
+                <a:ea typeface="Noto Sans CJK KR"/>
+                <a:cs typeface="Noto Sans CJK KR"/>
+              </a:rPr>
+              <a:t>만드는</a:t>
+            </a:r>
+            <a:r>
+              <a:rPr sz="1350" b="0" dirty="0">
+                <a:solidFill>
+                  <a:srgbClr val="182E43"/>
+                </a:solidFill>
+                <a:latin typeface="Noto Sans CJK KR"/>
+                <a:ea typeface="Noto Sans CJK KR"/>
+                <a:cs typeface="Noto Sans CJK KR"/>
+              </a:rPr>
+              <a:t> </a:t>
+            </a:r>
+            <a:r>
+              <a:rPr sz="1350" b="0" dirty="0" err="1">
+                <a:solidFill>
+                  <a:srgbClr val="182E43"/>
+                </a:solidFill>
+                <a:latin typeface="Noto Sans CJK KR"/>
+                <a:ea typeface="Noto Sans CJK KR"/>
+                <a:cs typeface="Noto Sans CJK KR"/>
+              </a:rPr>
+              <a:t>사람에게</a:t>
+            </a:r>
+            <a:r>
+              <a:rPr sz="1350" b="0" dirty="0">
+                <a:solidFill>
+                  <a:srgbClr val="182E43"/>
+                </a:solidFill>
+                <a:latin typeface="Noto Sans CJK KR"/>
+                <a:ea typeface="Noto Sans CJK KR"/>
+                <a:cs typeface="Noto Sans CJK KR"/>
+              </a:rPr>
+              <a:t>, </a:t>
+            </a:r>
+            <a:r>
+              <a:rPr sz="1350" b="0" dirty="0" err="1">
+                <a:solidFill>
+                  <a:srgbClr val="182E43"/>
+                </a:solidFill>
+                <a:latin typeface="Noto Sans CJK KR"/>
+                <a:ea typeface="Noto Sans CJK KR"/>
+                <a:cs typeface="Noto Sans CJK KR"/>
+              </a:rPr>
+              <a:t>쓰던</a:t>
+            </a:r>
+            <a:r>
+              <a:rPr sz="1350" b="0" dirty="0">
+                <a:solidFill>
+                  <a:srgbClr val="182E43"/>
+                </a:solidFill>
+                <a:latin typeface="Noto Sans CJK KR"/>
+                <a:ea typeface="Noto Sans CJK KR"/>
+                <a:cs typeface="Noto Sans CJK KR"/>
+              </a:rPr>
+              <a:t> </a:t>
+            </a:r>
+            <a:r>
+              <a:rPr sz="1350" b="0" dirty="0" err="1">
+                <a:solidFill>
+                  <a:srgbClr val="182E43"/>
+                </a:solidFill>
+                <a:latin typeface="Noto Sans CJK KR"/>
+                <a:ea typeface="Noto Sans CJK KR"/>
+                <a:cs typeface="Noto Sans CJK KR"/>
+              </a:rPr>
+              <a:t>도구를</a:t>
+            </a:r>
+            <a:r>
+              <a:rPr sz="1350" b="0" dirty="0">
+                <a:solidFill>
+                  <a:srgbClr val="182E43"/>
+                </a:solidFill>
+                <a:latin typeface="Noto Sans CJK KR"/>
+                <a:ea typeface="Noto Sans CJK KR"/>
+                <a:cs typeface="Noto Sans CJK KR"/>
+              </a:rPr>
+              <a:t> </a:t>
+            </a:r>
+            <a:r>
+              <a:rPr sz="1350" b="0" dirty="0" err="1">
+                <a:solidFill>
+                  <a:srgbClr val="182E43"/>
+                </a:solidFill>
+                <a:latin typeface="Noto Sans CJK KR"/>
+                <a:ea typeface="Noto Sans CJK KR"/>
+                <a:cs typeface="Noto Sans CJK KR"/>
+              </a:rPr>
+              <a:t>바꾸지</a:t>
+            </a:r>
+            <a:r>
+              <a:rPr sz="1350" b="0" dirty="0">
+                <a:solidFill>
+                  <a:srgbClr val="182E43"/>
+                </a:solidFill>
+                <a:latin typeface="Noto Sans CJK KR"/>
+                <a:ea typeface="Noto Sans CJK KR"/>
+                <a:cs typeface="Noto Sans CJK KR"/>
+              </a:rPr>
+              <a:t> </a:t>
+            </a:r>
+            <a:r>
+              <a:rPr sz="1350" b="0" dirty="0" err="1">
+                <a:solidFill>
+                  <a:srgbClr val="182E43"/>
+                </a:solidFill>
+                <a:latin typeface="Noto Sans CJK KR"/>
+                <a:ea typeface="Noto Sans CJK KR"/>
+                <a:cs typeface="Noto Sans CJK KR"/>
+              </a:rPr>
+              <a:t>않고</a:t>
+            </a:r>
+            <a:r>
+              <a:rPr sz="1350" b="0" dirty="0">
+                <a:solidFill>
+                  <a:srgbClr val="182E43"/>
+                </a:solidFill>
+                <a:latin typeface="Noto Sans CJK KR"/>
+                <a:ea typeface="Noto Sans CJK KR"/>
+                <a:cs typeface="Noto Sans CJK KR"/>
+              </a:rPr>
+              <a:t> </a:t>
+            </a:r>
+            <a:r>
+              <a:rPr sz="1350" b="0" dirty="0" err="1">
+                <a:solidFill>
+                  <a:srgbClr val="182E43"/>
+                </a:solidFill>
+                <a:latin typeface="Noto Sans CJK KR"/>
+                <a:ea typeface="Noto Sans CJK KR"/>
+                <a:cs typeface="Noto Sans CJK KR"/>
+              </a:rPr>
+              <a:t>과정을</a:t>
+            </a:r>
+            <a:r>
+              <a:rPr sz="1350" b="0" dirty="0">
+                <a:solidFill>
+                  <a:srgbClr val="182E43"/>
+                </a:solidFill>
+                <a:latin typeface="Noto Sans CJK KR"/>
+                <a:ea typeface="Noto Sans CJK KR"/>
+                <a:cs typeface="Noto Sans CJK KR"/>
+              </a:rPr>
+              <a:t> </a:t>
+            </a:r>
+            <a:r>
+              <a:rPr sz="1350" b="0" dirty="0" err="1">
+                <a:solidFill>
+                  <a:srgbClr val="182E43"/>
+                </a:solidFill>
+                <a:latin typeface="Noto Sans CJK KR"/>
+                <a:ea typeface="Noto Sans CJK KR"/>
+                <a:cs typeface="Noto Sans CJK KR"/>
+              </a:rPr>
+              <a:t>남겨</a:t>
+            </a:r>
+            <a:r>
+              <a:rPr sz="1350" b="0" dirty="0">
+                <a:solidFill>
+                  <a:srgbClr val="182E43"/>
+                </a:solidFill>
+                <a:latin typeface="Noto Sans CJK KR"/>
+                <a:ea typeface="Noto Sans CJK KR"/>
+                <a:cs typeface="Noto Sans CJK KR"/>
+              </a:rPr>
+              <a:t> ① </a:t>
+            </a:r>
+            <a:r>
+              <a:rPr sz="1350" b="0" dirty="0" err="1">
+                <a:solidFill>
+                  <a:srgbClr val="182E43"/>
+                </a:solidFill>
+                <a:latin typeface="Noto Sans CJK KR"/>
+                <a:ea typeface="Noto Sans CJK KR"/>
+                <a:cs typeface="Noto Sans CJK KR"/>
+              </a:rPr>
+              <a:t>스스로</a:t>
+            </a:r>
+            <a:r>
+              <a:rPr sz="1350" b="0" dirty="0">
+                <a:solidFill>
+                  <a:srgbClr val="182E43"/>
+                </a:solidFill>
+                <a:latin typeface="Noto Sans CJK KR"/>
+                <a:ea typeface="Noto Sans CJK KR"/>
+                <a:cs typeface="Noto Sans CJK KR"/>
+              </a:rPr>
+              <a:t> </a:t>
+            </a:r>
+            <a:r>
+              <a:rPr sz="1350" b="0" dirty="0" err="1">
+                <a:solidFill>
+                  <a:srgbClr val="182E43"/>
+                </a:solidFill>
+                <a:latin typeface="Noto Sans CJK KR"/>
+                <a:ea typeface="Noto Sans CJK KR"/>
+                <a:cs typeface="Noto Sans CJK KR"/>
+              </a:rPr>
+              <a:t>돌아보고</a:t>
+            </a:r>
+            <a:r>
+              <a:rPr sz="1350" b="0" dirty="0">
+                <a:solidFill>
+                  <a:srgbClr val="182E43"/>
+                </a:solidFill>
+                <a:latin typeface="Noto Sans CJK KR"/>
+                <a:ea typeface="Noto Sans CJK KR"/>
+                <a:cs typeface="Noto Sans CJK KR"/>
+              </a:rPr>
+              <a:t> ② </a:t>
+            </a:r>
+            <a:r>
+              <a:rPr sz="1350" b="0" dirty="0" err="1">
+                <a:solidFill>
+                  <a:srgbClr val="182E43"/>
+                </a:solidFill>
+                <a:latin typeface="Noto Sans CJK KR"/>
+                <a:ea typeface="Noto Sans CJK KR"/>
+                <a:cs typeface="Noto Sans CJK KR"/>
+              </a:rPr>
+              <a:t>필요할</a:t>
+            </a:r>
+            <a:r>
+              <a:rPr sz="1350" b="0" dirty="0">
+                <a:solidFill>
+                  <a:srgbClr val="182E43"/>
+                </a:solidFill>
+                <a:latin typeface="Noto Sans CJK KR"/>
+                <a:ea typeface="Noto Sans CJK KR"/>
+                <a:cs typeface="Noto Sans CJK KR"/>
+              </a:rPr>
+              <a:t> </a:t>
+            </a:r>
+            <a:r>
+              <a:rPr sz="1350" b="0" dirty="0" err="1">
+                <a:solidFill>
+                  <a:srgbClr val="182E43"/>
+                </a:solidFill>
+                <a:latin typeface="Noto Sans CJK KR"/>
+                <a:ea typeface="Noto Sans CJK KR"/>
+                <a:cs typeface="Noto Sans CJK KR"/>
+              </a:rPr>
+              <a:t>때만</a:t>
+            </a:r>
+            <a:r>
+              <a:rPr sz="1350" b="0" dirty="0">
+                <a:solidFill>
+                  <a:srgbClr val="182E43"/>
+                </a:solidFill>
+                <a:latin typeface="Noto Sans CJK KR"/>
+                <a:ea typeface="Noto Sans CJK KR"/>
+                <a:cs typeface="Noto Sans CJK KR"/>
+              </a:rPr>
+              <a:t> 제3자에게 </a:t>
+            </a:r>
+            <a:r>
+              <a:rPr sz="1350" b="0" dirty="0" err="1">
+                <a:solidFill>
+                  <a:srgbClr val="182E43"/>
+                </a:solidFill>
+                <a:latin typeface="Noto Sans CJK KR"/>
+                <a:ea typeface="Noto Sans CJK KR"/>
+                <a:cs typeface="Noto Sans CJK KR"/>
+              </a:rPr>
+              <a:t>보일</a:t>
+            </a:r>
+            <a:r>
+              <a:rPr sz="1350" b="0" dirty="0">
+                <a:solidFill>
+                  <a:srgbClr val="182E43"/>
+                </a:solidFill>
+                <a:latin typeface="Noto Sans CJK KR"/>
+                <a:ea typeface="Noto Sans CJK KR"/>
+                <a:cs typeface="Noto Sans CJK KR"/>
+              </a:rPr>
+              <a:t> </a:t>
+            </a:r>
+            <a:r>
+              <a:rPr sz="1350" b="0" dirty="0" err="1">
+                <a:solidFill>
+                  <a:srgbClr val="182E43"/>
+                </a:solidFill>
+                <a:latin typeface="Noto Sans CJK KR"/>
+                <a:ea typeface="Noto Sans CJK KR"/>
+                <a:cs typeface="Noto Sans CJK KR"/>
+              </a:rPr>
+              <a:t>수</a:t>
+            </a:r>
+            <a:r>
+              <a:rPr sz="1350" b="0" dirty="0">
+                <a:solidFill>
+                  <a:srgbClr val="182E43"/>
+                </a:solidFill>
+                <a:latin typeface="Noto Sans CJK KR"/>
+                <a:ea typeface="Noto Sans CJK KR"/>
+                <a:cs typeface="Noto Sans CJK KR"/>
+              </a:rPr>
+              <a:t> </a:t>
+            </a:r>
+            <a:r>
+              <a:rPr sz="1350" b="0" dirty="0" err="1">
+                <a:solidFill>
+                  <a:srgbClr val="182E43"/>
+                </a:solidFill>
+                <a:latin typeface="Noto Sans CJK KR"/>
+                <a:ea typeface="Noto Sans CJK KR"/>
+                <a:cs typeface="Noto Sans CJK KR"/>
+              </a:rPr>
+              <a:t>있게</a:t>
+            </a:r>
+            <a:r>
+              <a:rPr sz="1350" b="0" dirty="0">
+                <a:solidFill>
+                  <a:srgbClr val="182E43"/>
+                </a:solidFill>
+                <a:latin typeface="Noto Sans CJK KR"/>
+                <a:ea typeface="Noto Sans CJK KR"/>
+                <a:cs typeface="Noto Sans CJK KR"/>
+              </a:rPr>
+              <a:t> </a:t>
+            </a:r>
+            <a:r>
+              <a:rPr sz="1350" b="0" dirty="0" err="1">
+                <a:solidFill>
+                  <a:srgbClr val="182E43"/>
+                </a:solidFill>
+                <a:latin typeface="Noto Sans CJK KR"/>
+                <a:ea typeface="Noto Sans CJK KR"/>
+                <a:cs typeface="Noto Sans CJK KR"/>
+              </a:rPr>
+              <a:t>한다</a:t>
+            </a:r>
+            <a:r>
+              <a:rPr sz="1350" b="0" dirty="0">
+                <a:solidFill>
+                  <a:srgbClr val="182E43"/>
+                </a:solidFill>
+                <a:latin typeface="Noto Sans CJK KR"/>
+                <a:ea typeface="Noto Sans CJK KR"/>
+                <a:cs typeface="Noto Sans CJK KR"/>
+              </a:rPr>
+              <a:t>.</a:t>
             </a:r>
           </a:p>
           <a:p>
@@ -4457,15 +5487,290 @@
               </a:spcAft>
             </a:pPr>
             <a:r>
-              <a:rPr sz="1350" b="0">
-                <a:solidFill>
-                  <a:srgbClr val="182E43"/>
-                </a:solidFill>
-                <a:latin typeface="Noto Sans CJK KR"/>
-                <a:ea typeface="Noto Sans CJK KR"/>
-                <a:cs typeface="Noto Sans CJK KR"/>
-              </a:rPr>
-              <a:t>핵심 기능  ① Learn — 과정 회고 화면 (RQ1)   ② 도구를 가리지 않는 수집 (RQ2)   ③ Proof — 해시 체인 봉인과 증명 (RQ3)</a:t>
+              <a:rPr sz="1350" b="0" dirty="0" err="1">
+                <a:solidFill>
+                  <a:srgbClr val="182E43"/>
+                </a:solidFill>
+                <a:latin typeface="Noto Sans CJK KR"/>
+                <a:ea typeface="Noto Sans CJK KR"/>
+                <a:cs typeface="Noto Sans CJK KR"/>
+              </a:rPr>
+              <a:t>핵심</a:t>
+            </a:r>
+            <a:r>
+              <a:rPr sz="1350" b="0" dirty="0">
+                <a:solidFill>
+                  <a:srgbClr val="182E43"/>
+                </a:solidFill>
+                <a:latin typeface="Noto Sans CJK KR"/>
+                <a:ea typeface="Noto Sans CJK KR"/>
+                <a:cs typeface="Noto Sans CJK KR"/>
+              </a:rPr>
+              <a:t> </a:t>
+            </a:r>
+            <a:r>
+              <a:rPr sz="1350" b="0" dirty="0" err="1">
+                <a:solidFill>
+                  <a:srgbClr val="182E43"/>
+                </a:solidFill>
+                <a:latin typeface="Noto Sans CJK KR"/>
+                <a:ea typeface="Noto Sans CJK KR"/>
+                <a:cs typeface="Noto Sans CJK KR"/>
+              </a:rPr>
+              <a:t>기능</a:t>
+            </a:r>
+            <a:r>
+              <a:rPr sz="1350" b="0" dirty="0">
+                <a:solidFill>
+                  <a:srgbClr val="182E43"/>
+                </a:solidFill>
+                <a:latin typeface="Noto Sans CJK KR"/>
+                <a:ea typeface="Noto Sans CJK KR"/>
+                <a:cs typeface="Noto Sans CJK KR"/>
+              </a:rPr>
+              <a:t>  ① Learn — </a:t>
+            </a:r>
+            <a:r>
+              <a:rPr sz="1350" b="0" dirty="0" err="1">
+                <a:solidFill>
+                  <a:srgbClr val="182E43"/>
+                </a:solidFill>
+                <a:latin typeface="Noto Sans CJK KR"/>
+                <a:ea typeface="Noto Sans CJK KR"/>
+                <a:cs typeface="Noto Sans CJK KR"/>
+              </a:rPr>
+              <a:t>과정</a:t>
+            </a:r>
+            <a:r>
+              <a:rPr sz="1350" b="0" dirty="0">
+                <a:solidFill>
+                  <a:srgbClr val="182E43"/>
+                </a:solidFill>
+                <a:latin typeface="Noto Sans CJK KR"/>
+                <a:ea typeface="Noto Sans CJK KR"/>
+                <a:cs typeface="Noto Sans CJK KR"/>
+              </a:rPr>
+              <a:t> </a:t>
+            </a:r>
+            <a:r>
+              <a:rPr sz="1350" b="0" dirty="0" err="1">
+                <a:solidFill>
+                  <a:srgbClr val="182E43"/>
+                </a:solidFill>
+                <a:latin typeface="Noto Sans CJK KR"/>
+                <a:ea typeface="Noto Sans CJK KR"/>
+                <a:cs typeface="Noto Sans CJK KR"/>
+              </a:rPr>
+              <a:t>회고</a:t>
+            </a:r>
+            <a:r>
+              <a:rPr sz="1350" b="0" dirty="0">
+                <a:solidFill>
+                  <a:srgbClr val="182E43"/>
+                </a:solidFill>
+                <a:latin typeface="Noto Sans CJK KR"/>
+                <a:ea typeface="Noto Sans CJK KR"/>
+                <a:cs typeface="Noto Sans CJK KR"/>
+              </a:rPr>
+              <a:t> </a:t>
+            </a:r>
+            <a:r>
+              <a:rPr sz="1350" b="0" dirty="0" err="1">
+                <a:solidFill>
+                  <a:srgbClr val="182E43"/>
+                </a:solidFill>
+                <a:latin typeface="Noto Sans CJK KR"/>
+                <a:ea typeface="Noto Sans CJK KR"/>
+                <a:cs typeface="Noto Sans CJK KR"/>
+              </a:rPr>
+              <a:t>화면</a:t>
+            </a:r>
+            <a:r>
+              <a:rPr sz="1350" b="0" dirty="0">
+                <a:solidFill>
+                  <a:srgbClr val="182E43"/>
+                </a:solidFill>
+                <a:latin typeface="Noto Sans CJK KR"/>
+                <a:ea typeface="Noto Sans CJK KR"/>
+                <a:cs typeface="Noto Sans CJK KR"/>
+              </a:rPr>
+              <a:t> (RQ1)   ② </a:t>
+            </a:r>
+            <a:r>
+              <a:rPr sz="1350" b="0" dirty="0" err="1">
+                <a:solidFill>
+                  <a:srgbClr val="182E43"/>
+                </a:solidFill>
+                <a:latin typeface="Noto Sans CJK KR"/>
+                <a:ea typeface="Noto Sans CJK KR"/>
+                <a:cs typeface="Noto Sans CJK KR"/>
+              </a:rPr>
+              <a:t>도구를</a:t>
+            </a:r>
+            <a:r>
+              <a:rPr sz="1350" b="0" dirty="0">
+                <a:solidFill>
+                  <a:srgbClr val="182E43"/>
+                </a:solidFill>
+                <a:latin typeface="Noto Sans CJK KR"/>
+                <a:ea typeface="Noto Sans CJK KR"/>
+                <a:cs typeface="Noto Sans CJK KR"/>
+              </a:rPr>
+              <a:t> </a:t>
+            </a:r>
+            <a:r>
+              <a:rPr sz="1350" b="0" dirty="0" err="1">
+                <a:solidFill>
+                  <a:srgbClr val="182E43"/>
+                </a:solidFill>
+                <a:latin typeface="Noto Sans CJK KR"/>
+                <a:ea typeface="Noto Sans CJK KR"/>
+                <a:cs typeface="Noto Sans CJK KR"/>
+              </a:rPr>
+              <a:t>가리지</a:t>
+            </a:r>
+            <a:r>
+              <a:rPr sz="1350" b="0" dirty="0">
+                <a:solidFill>
+                  <a:srgbClr val="182E43"/>
+                </a:solidFill>
+                <a:latin typeface="Noto Sans CJK KR"/>
+                <a:ea typeface="Noto Sans CJK KR"/>
+                <a:cs typeface="Noto Sans CJK KR"/>
+              </a:rPr>
+              <a:t> </a:t>
+            </a:r>
+            <a:r>
+              <a:rPr sz="1350" b="0" dirty="0" err="1">
+                <a:solidFill>
+                  <a:srgbClr val="182E43"/>
+                </a:solidFill>
+                <a:latin typeface="Noto Sans CJK KR"/>
+                <a:ea typeface="Noto Sans CJK KR"/>
+                <a:cs typeface="Noto Sans CJK KR"/>
+              </a:rPr>
+              <a:t>않는</a:t>
+            </a:r>
+            <a:r>
+              <a:rPr sz="1350" b="0" dirty="0">
+                <a:solidFill>
+                  <a:srgbClr val="182E43"/>
+                </a:solidFill>
+                <a:latin typeface="Noto Sans CJK KR"/>
+                <a:ea typeface="Noto Sans CJK KR"/>
+                <a:cs typeface="Noto Sans CJK KR"/>
+              </a:rPr>
+              <a:t> </a:t>
+            </a:r>
+            <a:r>
+              <a:rPr sz="1350" b="0" dirty="0" err="1">
+                <a:solidFill>
+                  <a:srgbClr val="182E43"/>
+                </a:solidFill>
+                <a:latin typeface="Noto Sans CJK KR"/>
+                <a:ea typeface="Noto Sans CJK KR"/>
+                <a:cs typeface="Noto Sans CJK KR"/>
+              </a:rPr>
+              <a:t>수집</a:t>
+            </a:r>
+            <a:r>
+              <a:rPr sz="1350" b="0" dirty="0">
+                <a:solidFill>
+                  <a:srgbClr val="182E43"/>
+                </a:solidFill>
+                <a:latin typeface="Noto Sans CJK KR"/>
+                <a:ea typeface="Noto Sans CJK KR"/>
+                <a:cs typeface="Noto Sans CJK KR"/>
+              </a:rPr>
+              <a:t> (RQ2)   ③ Proof — </a:t>
+            </a:r>
+            <a:r>
+              <a:rPr sz="1350" b="0" dirty="0" err="1">
+                <a:solidFill>
+                  <a:srgbClr val="182E43"/>
+                </a:solidFill>
+                <a:latin typeface="Noto Sans CJK KR"/>
+                <a:ea typeface="Noto Sans CJK KR"/>
+                <a:cs typeface="Noto Sans CJK KR"/>
+              </a:rPr>
+              <a:t>해시</a:t>
+            </a:r>
+            <a:r>
+              <a:rPr sz="1350" b="0" dirty="0">
+                <a:solidFill>
+                  <a:srgbClr val="182E43"/>
+                </a:solidFill>
+                <a:latin typeface="Noto Sans CJK KR"/>
+                <a:ea typeface="Noto Sans CJK KR"/>
+                <a:cs typeface="Noto Sans CJK KR"/>
+              </a:rPr>
+              <a:t> </a:t>
+            </a:r>
+            <a:r>
+              <a:rPr sz="1350" b="0" dirty="0" err="1">
+                <a:solidFill>
+                  <a:srgbClr val="182E43"/>
+                </a:solidFill>
+                <a:latin typeface="Noto Sans CJK KR"/>
+                <a:ea typeface="Noto Sans CJK KR"/>
+                <a:cs typeface="Noto Sans CJK KR"/>
+              </a:rPr>
+              <a:t>체인</a:t>
+            </a:r>
+            <a:r>
+              <a:rPr sz="1350" b="0" dirty="0">
+                <a:solidFill>
+                  <a:srgbClr val="182E43"/>
+                </a:solidFill>
+                <a:latin typeface="Noto Sans CJK KR"/>
+                <a:ea typeface="Noto Sans CJK KR"/>
+                <a:cs typeface="Noto Sans CJK KR"/>
+              </a:rPr>
+              <a:t> </a:t>
+            </a:r>
+            <a:r>
+              <a:rPr sz="1350" b="0" dirty="0" err="1">
+                <a:solidFill>
+                  <a:srgbClr val="182E43"/>
+                </a:solidFill>
+                <a:latin typeface="Noto Sans CJK KR"/>
+                <a:ea typeface="Noto Sans CJK KR"/>
+                <a:cs typeface="Noto Sans CJK KR"/>
+              </a:rPr>
+              <a:t>봉인과</a:t>
+            </a:r>
+            <a:r>
+              <a:rPr sz="1350" b="0" dirty="0">
+                <a:solidFill>
+                  <a:srgbClr val="182E43"/>
+                </a:solidFill>
+                <a:latin typeface="Noto Sans CJK KR"/>
+                <a:ea typeface="Noto Sans CJK KR"/>
+                <a:cs typeface="Noto Sans CJK KR"/>
+              </a:rPr>
+              <a:t> </a:t>
+            </a:r>
+            <a:r>
+              <a:rPr sz="1350" b="0" dirty="0" err="1">
+                <a:solidFill>
+                  <a:srgbClr val="182E43"/>
+                </a:solidFill>
+                <a:latin typeface="Noto Sans CJK KR"/>
+                <a:ea typeface="Noto Sans CJK KR"/>
+                <a:cs typeface="Noto Sans CJK KR"/>
+              </a:rPr>
+              <a:t>증명</a:t>
+            </a:r>
+            <a:r>
+              <a:rPr sz="1350" b="0" dirty="0">
+                <a:solidFill>
+                  <a:srgbClr val="182E43"/>
+                </a:solidFill>
+                <a:latin typeface="Noto Sans CJK KR"/>
+                <a:ea typeface="Noto Sans CJK KR"/>
+                <a:cs typeface="Noto Sans CJK KR"/>
+              </a:rPr>
+              <a:t> (RQ3)</a:t>
             </a:r>
           </a:p>
         </p:txBody>
@@ -4637,7 +5942,7 @@
           </a:ln>
         </p:spPr>
         <p:txBody>
-          <a:bodyPr lIns="95250" tIns="95250" rIns="95250" bIns="95250" anchor="ctr" wrap="square">
+          <a:bodyPr wrap="square" lIns="95250" tIns="95250" rIns="95250" bIns="95250" anchor="ctr">
             <a:noAutofit/>
           </a:bodyPr>
           <a:lstStyle/>
@@ -4656,34 +5961,160 @@
               </a:defRPr>
             </a:pPr>
             <a:r>
-              <a:rPr sz="1350" b="0">
-                <a:solidFill>
-                  <a:srgbClr val="182E43"/>
-                </a:solidFill>
-                <a:latin typeface="Noto Sans CJK KR"/>
-                <a:ea typeface="Noto Sans CJK KR"/>
-                <a:cs typeface="Noto Sans CJK KR"/>
-              </a:rPr>
-              <a:t>학습자 · 교육자</a:t>
-            </a:r>
+              <a:rPr sz="1350" b="0" dirty="0" err="1">
+                <a:solidFill>
+                  <a:srgbClr val="182E43"/>
+                </a:solidFill>
+                <a:latin typeface="Noto Sans CJK KR"/>
+                <a:ea typeface="Noto Sans CJK KR"/>
+                <a:cs typeface="Noto Sans CJK KR"/>
+              </a:rPr>
+              <a:t>학습자</a:t>
+            </a:r>
+            <a:r>
+              <a:rPr sz="1350" b="0" dirty="0">
+                <a:solidFill>
+                  <a:srgbClr val="182E43"/>
+                </a:solidFill>
+                <a:latin typeface="Noto Sans CJK KR"/>
+                <a:ea typeface="Noto Sans CJK KR"/>
+                <a:cs typeface="Noto Sans CJK KR"/>
+              </a:rPr>
+              <a:t> · </a:t>
+            </a:r>
+            <a:r>
+              <a:rPr sz="1350" b="0" dirty="0" err="1">
+                <a:solidFill>
+                  <a:srgbClr val="182E43"/>
+                </a:solidFill>
+                <a:latin typeface="Noto Sans CJK KR"/>
+                <a:ea typeface="Noto Sans CJK KR"/>
+                <a:cs typeface="Noto Sans CJK KR"/>
+              </a:rPr>
+              <a:t>교육자</a:t>
+            </a:r>
+            <a:endParaRPr sz="1350" b="0" dirty="0">
+              <a:solidFill>
+                <a:srgbClr val="182E43"/>
+              </a:solidFill>
+              <a:latin typeface="Noto Sans CJK KR"/>
+              <a:ea typeface="Noto Sans CJK KR"/>
+              <a:cs typeface="Noto Sans CJK KR"/>
+            </a:endParaRPr>
           </a:p>
           <a:p>
-            <a:pPr>
+            <a:pPr algn="ctr">
               <a:spcAft>
                 <a:spcPts val="100"/>
               </a:spcAft>
             </a:pPr>
             <a:r>
-              <a:rPr sz="1350" b="0">
-                <a:solidFill>
-                  <a:srgbClr val="182E43"/>
-                </a:solidFill>
-                <a:latin typeface="Noto Sans CJK KR"/>
-                <a:ea typeface="Noto Sans CJK KR"/>
-                <a:cs typeface="Noto Sans CJK KR"/>
-              </a:rPr>
-              <a:t>쓰던 도구에서 작업 · 열람</a:t>
-            </a:r>
+              <a:rPr lang="en-US" altLang="ko-KR" sz="1350" dirty="0">
+                <a:solidFill>
+                  <a:srgbClr val="182E43"/>
+                </a:solidFill>
+                <a:latin typeface="Noto Sans CJK KR"/>
+                <a:ea typeface="Noto Sans CJK KR"/>
+                <a:cs typeface="Noto Sans CJK KR"/>
+              </a:rPr>
+              <a:t>-&gt;</a:t>
+            </a:r>
+            <a:r>
+              <a:rPr lang="ko-KR" altLang="en-US" sz="1350" dirty="0">
+                <a:solidFill>
+                  <a:srgbClr val="182E43"/>
+                </a:solidFill>
+                <a:latin typeface="Noto Sans CJK KR"/>
+                <a:ea typeface="Noto Sans CJK KR"/>
+                <a:cs typeface="Noto Sans CJK KR"/>
+              </a:rPr>
+              <a:t> </a:t>
+            </a:r>
+            <a:r>
+              <a:rPr sz="1350" b="0" dirty="0" err="1">
+                <a:solidFill>
+                  <a:srgbClr val="182E43"/>
+                </a:solidFill>
+                <a:latin typeface="Noto Sans CJK KR"/>
+                <a:ea typeface="Noto Sans CJK KR"/>
+                <a:cs typeface="Noto Sans CJK KR"/>
+              </a:rPr>
+              <a:t>쓰던</a:t>
+            </a:r>
+            <a:r>
+              <a:rPr sz="1350" b="0" dirty="0">
+                <a:solidFill>
+                  <a:srgbClr val="182E43"/>
+                </a:solidFill>
+                <a:latin typeface="Noto Sans CJK KR"/>
+                <a:ea typeface="Noto Sans CJK KR"/>
+                <a:cs typeface="Noto Sans CJK KR"/>
+              </a:rPr>
+              <a:t> </a:t>
+            </a:r>
+            <a:r>
+              <a:rPr sz="1350" b="0" dirty="0" err="1">
+                <a:solidFill>
+                  <a:srgbClr val="182E43"/>
+                </a:solidFill>
+                <a:latin typeface="Noto Sans CJK KR"/>
+                <a:ea typeface="Noto Sans CJK KR"/>
+                <a:cs typeface="Noto Sans CJK KR"/>
+              </a:rPr>
+              <a:t>도구에서</a:t>
+            </a:r>
+            <a:r>
+              <a:rPr sz="1350" b="0" dirty="0">
+                <a:solidFill>
+                  <a:srgbClr val="182E43"/>
+                </a:solidFill>
+                <a:latin typeface="Noto Sans CJK KR"/>
+                <a:ea typeface="Noto Sans CJK KR"/>
+                <a:cs typeface="Noto Sans CJK KR"/>
+              </a:rPr>
+              <a:t> </a:t>
+            </a:r>
+            <a:r>
+              <a:rPr sz="1350" b="0" dirty="0" err="1">
+                <a:solidFill>
+                  <a:srgbClr val="182E43"/>
+                </a:solidFill>
+                <a:latin typeface="Noto Sans CJK KR"/>
+                <a:ea typeface="Noto Sans CJK KR"/>
+                <a:cs typeface="Noto Sans CJK KR"/>
+              </a:rPr>
+              <a:t>작업</a:t>
+            </a:r>
+            <a:r>
+              <a:rPr sz="1350" b="0" dirty="0">
+                <a:solidFill>
+                  <a:srgbClr val="182E43"/>
+                </a:solidFill>
+                <a:latin typeface="Noto Sans CJK KR"/>
+                <a:ea typeface="Noto Sans CJK KR"/>
+                <a:cs typeface="Noto Sans CJK KR"/>
+              </a:rPr>
+              <a:t> · </a:t>
+            </a:r>
+            <a:r>
+              <a:rPr sz="1350" b="0" dirty="0" err="1">
+                <a:solidFill>
+                  <a:srgbClr val="182E43"/>
+                </a:solidFill>
+                <a:latin typeface="Noto Sans CJK KR"/>
+                <a:ea typeface="Noto Sans CJK KR"/>
+                <a:cs typeface="Noto Sans CJK KR"/>
+              </a:rPr>
+              <a:t>열람</a:t>
+            </a:r>
+            <a:endParaRPr sz="1350" b="0" dirty="0">
+              <a:solidFill>
+                <a:srgbClr val="182E43"/>
+              </a:solidFill>
+              <a:latin typeface="Noto Sans CJK KR"/>
+              <a:ea typeface="Noto Sans CJK KR"/>
+              <a:cs typeface="Noto Sans CJK KR"/>
+            </a:endParaRPr>
           </a:p>
         </p:txBody>
       </p:sp>
@@ -4719,7 +6150,7 @@
           </a:ln>
         </p:spPr>
         <p:txBody>
-          <a:bodyPr lIns="95250" tIns="95250" rIns="95250" bIns="95250" anchor="ctr" wrap="square">
+          <a:bodyPr wrap="square" lIns="95250" tIns="95250" rIns="95250" bIns="95250" anchor="ctr">
             <a:noAutofit/>
           </a:bodyPr>
           <a:lstStyle/>
@@ -4738,34 +6169,163 @@
               </a:defRPr>
             </a:pPr>
             <a:r>
-              <a:rPr sz="1350" b="0">
-                <a:solidFill>
-                  <a:srgbClr val="182E43"/>
-                </a:solidFill>
-                <a:latin typeface="Noto Sans CJK KR"/>
-                <a:ea typeface="Noto Sans CJK KR"/>
-                <a:cs typeface="Noto Sans CJK KR"/>
-              </a:rPr>
-              <a:t>수집기 (PC 상주)</a:t>
+              <a:rPr sz="1350" b="0" dirty="0" err="1">
+                <a:solidFill>
+                  <a:srgbClr val="182E43"/>
+                </a:solidFill>
+                <a:latin typeface="Noto Sans CJK KR"/>
+                <a:ea typeface="Noto Sans CJK KR"/>
+                <a:cs typeface="Noto Sans CJK KR"/>
+              </a:rPr>
+              <a:t>수집기</a:t>
+            </a:r>
+            <a:r>
+              <a:rPr sz="1350" b="0" dirty="0">
+                <a:solidFill>
+                  <a:srgbClr val="182E43"/>
+                </a:solidFill>
+                <a:latin typeface="Noto Sans CJK KR"/>
+                <a:ea typeface="Noto Sans CJK KR"/>
+                <a:cs typeface="Noto Sans CJK KR"/>
+              </a:rPr>
+              <a:t> (PC </a:t>
+            </a:r>
+            <a:r>
+              <a:rPr sz="1350" b="0" dirty="0" err="1">
+                <a:solidFill>
+                  <a:srgbClr val="182E43"/>
+                </a:solidFill>
+                <a:latin typeface="Noto Sans CJK KR"/>
+                <a:ea typeface="Noto Sans CJK KR"/>
+                <a:cs typeface="Noto Sans CJK KR"/>
+              </a:rPr>
+              <a:t>상주</a:t>
+            </a:r>
+            <a:r>
+              <a:rPr sz="1350" b="0" dirty="0">
+                <a:solidFill>
+                  <a:srgbClr val="182E43"/>
+                </a:solidFill>
+                <a:latin typeface="Noto Sans CJK KR"/>
+                <a:ea typeface="Noto Sans CJK KR"/>
+                <a:cs typeface="Noto Sans CJK KR"/>
+              </a:rPr>
+              <a:t>)</a:t>
             </a:r>
           </a:p>
           <a:p>
-            <a:pPr>
+            <a:pPr algn="ctr">
               <a:spcAft>
                 <a:spcPts val="100"/>
               </a:spcAft>
             </a:pPr>
             <a:r>
-              <a:rPr sz="1350" b="0">
-                <a:solidFill>
-                  <a:srgbClr val="182E43"/>
-                </a:solidFill>
-                <a:latin typeface="Noto Sans CJK KR"/>
-                <a:ea typeface="Noto Sans CJK KR"/>
-                <a:cs typeface="Noto Sans CJK KR"/>
-              </a:rPr>
-              <a:t>앱 · 파일 · 클립보드 관측</a:t>
-            </a:r>
+              <a:rPr lang="en-US" altLang="ko-KR" sz="1350" dirty="0">
+                <a:solidFill>
+                  <a:srgbClr val="182E43"/>
+                </a:solidFill>
+                <a:latin typeface="Noto Sans CJK KR"/>
+                <a:ea typeface="Noto Sans CJK KR"/>
+                <a:cs typeface="Noto Sans CJK KR"/>
+              </a:rPr>
+              <a:t>-&gt;</a:t>
+            </a:r>
+            <a:r>
+              <a:rPr lang="ko-KR" altLang="en-US" sz="1350" dirty="0">
+                <a:solidFill>
+                  <a:srgbClr val="182E43"/>
+                </a:solidFill>
+                <a:latin typeface="Noto Sans CJK KR"/>
+                <a:ea typeface="Noto Sans CJK KR"/>
+                <a:cs typeface="Noto Sans CJK KR"/>
+              </a:rPr>
+              <a:t> </a:t>
+            </a:r>
+            <a:r>
+              <a:rPr sz="1350" b="0" dirty="0" err="1">
+                <a:solidFill>
+                  <a:srgbClr val="182E43"/>
+                </a:solidFill>
+                <a:latin typeface="Noto Sans CJK KR"/>
+                <a:ea typeface="Noto Sans CJK KR"/>
+                <a:cs typeface="Noto Sans CJK KR"/>
+              </a:rPr>
+              <a:t>앱</a:t>
+            </a:r>
+            <a:r>
+              <a:rPr sz="1350" b="0" dirty="0">
+                <a:solidFill>
+                  <a:srgbClr val="182E43"/>
+                </a:solidFill>
+                <a:latin typeface="Noto Sans CJK KR"/>
+                <a:ea typeface="Noto Sans CJK KR"/>
+                <a:cs typeface="Noto Sans CJK KR"/>
+              </a:rPr>
+              <a:t> · </a:t>
+            </a:r>
+            <a:r>
+              <a:rPr sz="1350" b="0" dirty="0" err="1">
+                <a:solidFill>
+                  <a:srgbClr val="182E43"/>
+                </a:solidFill>
+                <a:latin typeface="Noto Sans CJK KR"/>
+                <a:ea typeface="Noto Sans CJK KR"/>
+                <a:cs typeface="Noto Sans CJK KR"/>
+              </a:rPr>
+              <a:t>파일</a:t>
+            </a:r>
+            <a:r>
+              <a:rPr sz="1350" b="0" dirty="0">
+                <a:solidFill>
+                  <a:srgbClr val="182E43"/>
+                </a:solidFill>
+                <a:latin typeface="Noto Sans CJK KR"/>
+                <a:ea typeface="Noto Sans CJK KR"/>
+                <a:cs typeface="Noto Sans CJK KR"/>
+              </a:rPr>
+              <a:t> · </a:t>
+            </a:r>
+            <a:r>
+              <a:rPr sz="1350" b="0" dirty="0" err="1">
+                <a:solidFill>
+                  <a:srgbClr val="182E43"/>
+                </a:solidFill>
+                <a:latin typeface="Noto Sans CJK KR"/>
+                <a:ea typeface="Noto Sans CJK KR"/>
+                <a:cs typeface="Noto Sans CJK KR"/>
+              </a:rPr>
+              <a:t>클립보드</a:t>
+            </a:r>
+            <a:r>
+              <a:rPr sz="1350" b="0" dirty="0">
+                <a:solidFill>
+                  <a:srgbClr val="182E43"/>
+                </a:solidFill>
+                <a:latin typeface="Noto Sans CJK KR"/>
+                <a:ea typeface="Noto Sans CJK KR"/>
+                <a:cs typeface="Noto Sans CJK KR"/>
+              </a:rPr>
+              <a:t> </a:t>
+            </a:r>
+            <a:r>
+              <a:rPr sz="1350" b="0" dirty="0" err="1">
+                <a:solidFill>
+                  <a:srgbClr val="182E43"/>
+                </a:solidFill>
+                <a:latin typeface="Noto Sans CJK KR"/>
+                <a:ea typeface="Noto Sans CJK KR"/>
+                <a:cs typeface="Noto Sans CJK KR"/>
+              </a:rPr>
+              <a:t>관측</a:t>
+            </a:r>
+            <a:endParaRPr sz="1350" b="0" dirty="0">
+              <a:solidFill>
+                <a:srgbClr val="182E43"/>
+              </a:solidFill>
+              <a:latin typeface="Noto Sans CJK KR"/>
+              <a:ea typeface="Noto Sans CJK KR"/>
+              <a:cs typeface="Noto Sans CJK KR"/>
+            </a:endParaRPr>
           </a:p>
         </p:txBody>
       </p:sp>
@@ -4801,7 +6361,7 @@
           </a:ln>
         </p:spPr>
         <p:txBody>
-          <a:bodyPr lIns="95250" tIns="95250" rIns="95250" bIns="95250" anchor="ctr" wrap="square">
+          <a:bodyPr wrap="square" lIns="95250" tIns="95250" rIns="95250" bIns="95250" anchor="ctr">
             <a:noAutofit/>
           </a:bodyPr>
           <a:lstStyle/>
@@ -4820,34 +6380,108 @@
               </a:defRPr>
             </a:pPr>
             <a:r>
-              <a:rPr sz="1350" b="0">
-                <a:solidFill>
-                  <a:srgbClr val="182E43"/>
-                </a:solidFill>
-                <a:latin typeface="Noto Sans CJK KR"/>
-                <a:ea typeface="Noto Sans CJK KR"/>
-                <a:cs typeface="Noto Sans CJK KR"/>
-              </a:rPr>
-              <a:t>서버 (Flask)</a:t>
+              <a:rPr sz="1350" b="0" dirty="0" err="1">
+                <a:solidFill>
+                  <a:srgbClr val="182E43"/>
+                </a:solidFill>
+                <a:latin typeface="Noto Sans CJK KR"/>
+                <a:ea typeface="Noto Sans CJK KR"/>
+                <a:cs typeface="Noto Sans CJK KR"/>
+              </a:rPr>
+              <a:t>서버</a:t>
+            </a:r>
+            <a:r>
+              <a:rPr sz="1350" b="0" dirty="0">
+                <a:solidFill>
+                  <a:srgbClr val="182E43"/>
+                </a:solidFill>
+                <a:latin typeface="Noto Sans CJK KR"/>
+                <a:ea typeface="Noto Sans CJK KR"/>
+                <a:cs typeface="Noto Sans CJK KR"/>
+              </a:rPr>
+              <a:t> (Flask)</a:t>
             </a:r>
           </a:p>
           <a:p>
-            <a:pPr>
+            <a:pPr algn="ctr">
               <a:spcAft>
                 <a:spcPts val="100"/>
               </a:spcAft>
             </a:pPr>
             <a:r>
-              <a:rPr sz="1350" b="0">
-                <a:solidFill>
-                  <a:srgbClr val="182E43"/>
-                </a:solidFill>
-                <a:latin typeface="Noto Sans CJK KR"/>
-                <a:ea typeface="Noto Sans CJK KR"/>
-                <a:cs typeface="Noto Sans CJK KR"/>
-              </a:rPr>
-              <a:t>Learn 회고 · Proof 검증</a:t>
-            </a:r>
+              <a:rPr lang="en-US" altLang="ko-KR" sz="1350" dirty="0">
+                <a:solidFill>
+                  <a:srgbClr val="182E43"/>
+                </a:solidFill>
+                <a:latin typeface="Noto Sans CJK KR"/>
+                <a:ea typeface="Noto Sans CJK KR"/>
+                <a:cs typeface="Noto Sans CJK KR"/>
+              </a:rPr>
+              <a:t>-&gt;</a:t>
+            </a:r>
+            <a:r>
+              <a:rPr lang="ko-KR" altLang="en-US" sz="1350" dirty="0">
+                <a:solidFill>
+                  <a:srgbClr val="182E43"/>
+                </a:solidFill>
+                <a:latin typeface="Noto Sans CJK KR"/>
+                <a:ea typeface="Noto Sans CJK KR"/>
+                <a:cs typeface="Noto Sans CJK KR"/>
+              </a:rPr>
+              <a:t> </a:t>
+            </a:r>
+            <a:r>
+              <a:rPr sz="1350" b="0" dirty="0">
+                <a:solidFill>
+                  <a:srgbClr val="182E43"/>
+                </a:solidFill>
+                <a:latin typeface="Noto Sans CJK KR"/>
+                <a:ea typeface="Noto Sans CJK KR"/>
+                <a:cs typeface="Noto Sans CJK KR"/>
+              </a:rPr>
+              <a:t>Learn </a:t>
+            </a:r>
+            <a:r>
+              <a:rPr sz="1350" b="0" dirty="0" err="1">
+                <a:solidFill>
+                  <a:srgbClr val="182E43"/>
+                </a:solidFill>
+                <a:latin typeface="Noto Sans CJK KR"/>
+                <a:ea typeface="Noto Sans CJK KR"/>
+                <a:cs typeface="Noto Sans CJK KR"/>
+              </a:rPr>
+              <a:t>회고</a:t>
+            </a:r>
+            <a:r>
+              <a:rPr sz="1350" b="0" dirty="0">
+                <a:solidFill>
+                  <a:srgbClr val="182E43"/>
+                </a:solidFill>
+                <a:latin typeface="Noto Sans CJK KR"/>
+                <a:ea typeface="Noto Sans CJK KR"/>
+                <a:cs typeface="Noto Sans CJK KR"/>
+              </a:rPr>
+              <a:t> · Proof </a:t>
+            </a:r>
+            <a:r>
+              <a:rPr sz="1350" b="0" dirty="0" err="1">
+                <a:solidFill>
+                  <a:srgbClr val="182E43"/>
+                </a:solidFill>
+                <a:latin typeface="Noto Sans CJK KR"/>
+                <a:ea typeface="Noto Sans CJK KR"/>
+                <a:cs typeface="Noto Sans CJK KR"/>
+              </a:rPr>
+              <a:t>검증</a:t>
+            </a:r>
+            <a:endParaRPr sz="1350" b="0" dirty="0">
+              <a:solidFill>
+                <a:srgbClr val="182E43"/>
+              </a:solidFill>
+              <a:latin typeface="Noto Sans CJK KR"/>
+              <a:ea typeface="Noto Sans CJK KR"/>
+              <a:cs typeface="Noto Sans CJK KR"/>
+            </a:endParaRPr>
           </a:p>
         </p:txBody>
       </p:sp>
@@ -4883,7 +6517,7 @@
           </a:ln>
         </p:spPr>
         <p:txBody>
-          <a:bodyPr lIns="95250" tIns="95250" rIns="95250" bIns="95250" anchor="ctr" wrap="square">
+          <a:bodyPr wrap="square" lIns="95250" tIns="95250" rIns="95250" bIns="95250" anchor="ctr">
             <a:noAutofit/>
           </a:bodyPr>
           <a:lstStyle/>
@@ -4902,34 +6536,149 @@
               </a:defRPr>
             </a:pPr>
             <a:r>
-              <a:rPr sz="1350" b="0">
-                <a:solidFill>
-                  <a:srgbClr val="182E43"/>
-                </a:solidFill>
-                <a:latin typeface="Noto Sans CJK KR"/>
-                <a:ea typeface="Noto Sans CJK KR"/>
-                <a:cs typeface="Noto Sans CJK KR"/>
-              </a:rPr>
-              <a:t>외부 앵커</a:t>
-            </a:r>
+              <a:rPr sz="1350" b="0" dirty="0" err="1">
+                <a:solidFill>
+                  <a:srgbClr val="182E43"/>
+                </a:solidFill>
+                <a:latin typeface="Noto Sans CJK KR"/>
+                <a:ea typeface="Noto Sans CJK KR"/>
+                <a:cs typeface="Noto Sans CJK KR"/>
+              </a:rPr>
+              <a:t>외부</a:t>
+            </a:r>
+            <a:r>
+              <a:rPr sz="1350" b="0" dirty="0">
+                <a:solidFill>
+                  <a:srgbClr val="182E43"/>
+                </a:solidFill>
+                <a:latin typeface="Noto Sans CJK KR"/>
+                <a:ea typeface="Noto Sans CJK KR"/>
+                <a:cs typeface="Noto Sans CJK KR"/>
+              </a:rPr>
+              <a:t> </a:t>
+            </a:r>
+            <a:r>
+              <a:rPr sz="1350" b="0" dirty="0" err="1">
+                <a:solidFill>
+                  <a:srgbClr val="182E43"/>
+                </a:solidFill>
+                <a:latin typeface="Noto Sans CJK KR"/>
+                <a:ea typeface="Noto Sans CJK KR"/>
+                <a:cs typeface="Noto Sans CJK KR"/>
+              </a:rPr>
+              <a:t>앵커</a:t>
+            </a:r>
+            <a:endParaRPr sz="1350" b="0" dirty="0">
+              <a:solidFill>
+                <a:srgbClr val="182E43"/>
+              </a:solidFill>
+              <a:latin typeface="Noto Sans CJK KR"/>
+              <a:ea typeface="Noto Sans CJK KR"/>
+              <a:cs typeface="Noto Sans CJK KR"/>
+            </a:endParaRPr>
           </a:p>
           <a:p>
-            <a:pPr>
+            <a:pPr algn="ctr">
               <a:spcAft>
                 <a:spcPts val="100"/>
               </a:spcAft>
             </a:pPr>
             <a:r>
-              <a:rPr sz="1350" b="0">
-                <a:solidFill>
-                  <a:srgbClr val="182E43"/>
-                </a:solidFill>
-                <a:latin typeface="Noto Sans CJK KR"/>
-                <a:ea typeface="Noto Sans CJK KR"/>
-                <a:cs typeface="Noto Sans CJK KR"/>
-              </a:rPr>
-              <a:t>작품 루트 해시 고정</a:t>
-            </a:r>
+              <a:rPr lang="en-US" altLang="ko-KR" sz="1350" dirty="0">
+                <a:solidFill>
+                  <a:srgbClr val="182E43"/>
+                </a:solidFill>
+                <a:latin typeface="Noto Sans CJK KR"/>
+                <a:ea typeface="Noto Sans CJK KR"/>
+                <a:cs typeface="Noto Sans CJK KR"/>
+              </a:rPr>
+              <a:t>-&gt;</a:t>
+            </a:r>
+            <a:r>
+              <a:rPr lang="ko-KR" altLang="en-US" sz="1350" dirty="0">
+                <a:solidFill>
+                  <a:srgbClr val="182E43"/>
+                </a:solidFill>
+                <a:latin typeface="Noto Sans CJK KR"/>
+                <a:ea typeface="Noto Sans CJK KR"/>
+                <a:cs typeface="Noto Sans CJK KR"/>
+              </a:rPr>
+              <a:t> 과정</a:t>
+            </a:r>
+            <a:r>
+              <a:rPr sz="1350" b="0" dirty="0">
+                <a:solidFill>
+                  <a:srgbClr val="182E43"/>
+                </a:solidFill>
+                <a:latin typeface="Noto Sans CJK KR"/>
+                <a:ea typeface="Noto Sans CJK KR"/>
+                <a:cs typeface="Noto Sans CJK KR"/>
+              </a:rPr>
+              <a:t> </a:t>
+            </a:r>
+            <a:r>
+              <a:rPr sz="1350" b="0" dirty="0" err="1">
+                <a:solidFill>
+                  <a:srgbClr val="182E43"/>
+                </a:solidFill>
+                <a:latin typeface="Noto Sans CJK KR"/>
+                <a:ea typeface="Noto Sans CJK KR"/>
+                <a:cs typeface="Noto Sans CJK KR"/>
+              </a:rPr>
+              <a:t>루트</a:t>
+            </a:r>
+            <a:r>
+              <a:rPr sz="1350" b="0" dirty="0">
+                <a:solidFill>
+                  <a:srgbClr val="182E43"/>
+                </a:solidFill>
+                <a:latin typeface="Noto Sans CJK KR"/>
+                <a:ea typeface="Noto Sans CJK KR"/>
+                <a:cs typeface="Noto Sans CJK KR"/>
+              </a:rPr>
+              <a:t> </a:t>
+            </a:r>
+            <a:r>
+              <a:rPr sz="1350" b="0" dirty="0" err="1">
+                <a:solidFill>
+                  <a:srgbClr val="182E43"/>
+                </a:solidFill>
+                <a:latin typeface="Noto Sans CJK KR"/>
+                <a:ea typeface="Noto Sans CJK KR"/>
+                <a:cs typeface="Noto Sans CJK KR"/>
+              </a:rPr>
+              <a:t>해시</a:t>
+            </a:r>
+            <a:r>
+              <a:rPr sz="1350" b="0" dirty="0">
+                <a:solidFill>
+                  <a:srgbClr val="182E43"/>
+                </a:solidFill>
+                <a:latin typeface="Noto Sans CJK KR"/>
+                <a:ea typeface="Noto Sans CJK KR"/>
+                <a:cs typeface="Noto Sans CJK KR"/>
+              </a:rPr>
+              <a:t> </a:t>
+            </a:r>
+            <a:r>
+              <a:rPr sz="1350" b="0" dirty="0" err="1">
+                <a:solidFill>
+                  <a:srgbClr val="182E43"/>
+                </a:solidFill>
+                <a:latin typeface="Noto Sans CJK KR"/>
+                <a:ea typeface="Noto Sans CJK KR"/>
+                <a:cs typeface="Noto Sans CJK KR"/>
+              </a:rPr>
+              <a:t>고정</a:t>
+            </a:r>
+            <a:endParaRPr sz="1350" b="0" dirty="0">
+              <a:solidFill>
+                <a:srgbClr val="182E43"/>
+              </a:solidFill>
+              <a:latin typeface="Noto Sans CJK KR"/>
+              <a:ea typeface="Noto Sans CJK KR"/>
+              <a:cs typeface="Noto Sans CJK KR"/>
+            </a:endParaRPr>
           </a:p>
         </p:txBody>
       </p:sp>
@@ -4965,7 +6714,7 @@
           </a:ln>
         </p:spPr>
         <p:txBody>
-          <a:bodyPr lIns="95250" tIns="95250" rIns="95250" bIns="95250" anchor="ctr" wrap="square">
+          <a:bodyPr wrap="square" lIns="95250" tIns="95250" rIns="95250" bIns="95250" anchor="ctr">
             <a:noAutofit/>
           </a:bodyPr>
           <a:lstStyle/>
@@ -4984,7 +6733,7 @@
               </a:defRPr>
             </a:pPr>
             <a:r>
-              <a:rPr sz="1350" b="0">
+              <a:rPr sz="1350" b="0" dirty="0" err="1">
                 <a:solidFill>
                   <a:srgbClr val="182E43"/>
                 </a:solidFill>
@@ -4994,24 +6743,106 @@
               </a:rPr>
               <a:t>chain.json</a:t>
             </a:r>
+            <a:endParaRPr sz="1350" b="0" dirty="0">
+              <a:solidFill>
+                <a:srgbClr val="182E43"/>
+              </a:solidFill>
+              <a:latin typeface="Noto Sans CJK KR"/>
+              <a:ea typeface="Noto Sans CJK KR"/>
+              <a:cs typeface="Noto Sans CJK KR"/>
+            </a:endParaRPr>
           </a:p>
           <a:p>
-            <a:pPr>
+            <a:pPr algn="ctr">
               <a:spcAft>
                 <a:spcPts val="100"/>
               </a:spcAft>
             </a:pPr>
             <a:r>
-              <a:rPr sz="1350" b="0">
-                <a:solidFill>
-                  <a:srgbClr val="182E43"/>
-                </a:solidFill>
-                <a:latin typeface="Noto Sans CJK KR"/>
-                <a:ea typeface="Noto Sans CJK KR"/>
-                <a:cs typeface="Noto Sans CJK KR"/>
-              </a:rPr>
-              <a:t>해시 · 이벤트만 저장</a:t>
-            </a:r>
+              <a:rPr lang="en-US" altLang="ko-KR" sz="1350" dirty="0">
+                <a:solidFill>
+                  <a:srgbClr val="182E43"/>
+                </a:solidFill>
+                <a:latin typeface="Noto Sans CJK KR"/>
+                <a:ea typeface="Noto Sans CJK KR"/>
+                <a:cs typeface="Noto Sans CJK KR"/>
+              </a:rPr>
+              <a:t>-&gt;</a:t>
+            </a:r>
+            <a:r>
+              <a:rPr lang="ko-KR" altLang="en-US" sz="1350" dirty="0">
+                <a:solidFill>
+                  <a:srgbClr val="182E43"/>
+                </a:solidFill>
+                <a:latin typeface="Noto Sans CJK KR"/>
+                <a:ea typeface="Noto Sans CJK KR"/>
+                <a:cs typeface="Noto Sans CJK KR"/>
+              </a:rPr>
+              <a:t> </a:t>
+            </a:r>
+            <a:r>
+              <a:rPr sz="1350" b="0" dirty="0" err="1">
+                <a:solidFill>
+                  <a:srgbClr val="182E43"/>
+                </a:solidFill>
+                <a:latin typeface="Noto Sans CJK KR"/>
+                <a:ea typeface="Noto Sans CJK KR"/>
+                <a:cs typeface="Noto Sans CJK KR"/>
+              </a:rPr>
+              <a:t>해시</a:t>
+            </a:r>
+            <a:r>
+              <a:rPr sz="1350" b="0" dirty="0">
+                <a:solidFill>
+                  <a:srgbClr val="182E43"/>
+                </a:solidFill>
+                <a:latin typeface="Noto Sans CJK KR"/>
+                <a:ea typeface="Noto Sans CJK KR"/>
+                <a:cs typeface="Noto Sans CJK KR"/>
+              </a:rPr>
+              <a:t> · </a:t>
+            </a:r>
+            <a:r>
+              <a:rPr sz="1350" b="0" dirty="0" err="1">
+                <a:solidFill>
+                  <a:srgbClr val="182E43"/>
+                </a:solidFill>
+                <a:latin typeface="Noto Sans CJK KR"/>
+                <a:ea typeface="Noto Sans CJK KR"/>
+                <a:cs typeface="Noto Sans CJK KR"/>
+              </a:rPr>
+              <a:t>이벤트만</a:t>
+            </a:r>
+            <a:r>
+              <a:rPr sz="1350" b="0" dirty="0">
+                <a:solidFill>
+                  <a:srgbClr val="182E43"/>
+                </a:solidFill>
+                <a:latin typeface="Noto Sans CJK KR"/>
+                <a:ea typeface="Noto Sans CJK KR"/>
+                <a:cs typeface="Noto Sans CJK KR"/>
+              </a:rPr>
+              <a:t> </a:t>
+            </a:r>
+            <a:r>
+              <a:rPr sz="1350" b="0" dirty="0" err="1">
+                <a:solidFill>
+                  <a:srgbClr val="182E43"/>
+                </a:solidFill>
+                <a:latin typeface="Noto Sans CJK KR"/>
+                <a:ea typeface="Noto Sans CJK KR"/>
+                <a:cs typeface="Noto Sans CJK KR"/>
+              </a:rPr>
+              <a:t>저장</a:t>
+            </a:r>
+            <a:endParaRPr sz="1350" b="0" dirty="0">
+              <a:solidFill>
+                <a:srgbClr val="182E43"/>
+              </a:solidFill>
+              <a:latin typeface="Noto Sans CJK KR"/>
+              <a:ea typeface="Noto Sans CJK KR"/>
+              <a:cs typeface="Noto Sans CJK KR"/>
+            </a:endParaRPr>
           </a:p>
         </p:txBody>
       </p:sp>
@@ -5307,7 +7138,7 @@
         </p:nvGraphicFramePr>
         <p:xfrm>
           <a:off x="723900" y="6400800"/>
-          <a:ext cx="12435840" cy="822960"/>
+          <a:ext cx="13754100" cy="898652"/>
         </p:xfrm>
         <a:graphic>
           <a:graphicData uri="http://schemas.openxmlformats.org/drawingml/2006/table">
@@ -5480,7 +7311,7 @@
               <a:tr h="274320">
                 <a:tc>
                   <a:txBody>
-                    <a:bodyPr wrap="square"/>
+                    <a:bodyPr/>
                     <a:lstStyle/>
                     <a:p>
                       <a:pPr>
@@ -5527,7 +7358,7 @@
                 </a:tc>
                 <a:tc>
                   <a:txBody>
-                    <a:bodyPr wrap="square"/>
+                    <a:bodyPr/>
                     <a:lstStyle/>
                     <a:p>
                       <a:pPr>
@@ -5536,7 +7367,7 @@
                         </a:spcAft>
                       </a:pPr>
                       <a:r>
-                        <a:rPr sz="750" b="0">
+                        <a:rPr sz="750" b="0" dirty="0" err="1">
                           <a:solidFill>
                             <a:srgbClr val="182E43"/>
                           </a:solidFill>
@@ -5544,7 +7375,62 @@
                           <a:ea typeface="Noto Sans CJK KR"/>
                           <a:cs typeface="Noto Sans CJK KR"/>
                         </a:rPr>
-                        <a:t>스냅샷 390건 체인에서 content_hash 1자를</a:t>
+                        <a:t>스냅샷</a:t>
+                      </a:r>
+                      <a:r>
+                        <a:rPr sz="750" b="0" dirty="0">
+                          <a:solidFill>
+                            <a:srgbClr val="182E43"/>
+                          </a:solidFill>
+                          <a:latin typeface="Noto Sans CJK KR"/>
+                          <a:ea typeface="Noto Sans CJK KR"/>
+                          <a:cs typeface="Noto Sans CJK KR"/>
+                        </a:rPr>
+                        <a:t> 390건 </a:t>
+                      </a:r>
+                      <a:r>
+                        <a:rPr sz="750" b="0" dirty="0" err="1">
+                          <a:solidFill>
+                            <a:srgbClr val="182E43"/>
+                          </a:solidFill>
+                          <a:latin typeface="Noto Sans CJK KR"/>
+                          <a:ea typeface="Noto Sans CJK KR"/>
+                          <a:cs typeface="Noto Sans CJK KR"/>
+                        </a:rPr>
+                        <a:t>체인에서</a:t>
+                      </a:r>
+                      <a:r>
+                        <a:rPr sz="750" b="0" dirty="0">
+                          <a:solidFill>
+                            <a:srgbClr val="182E43"/>
+                          </a:solidFill>
+                          <a:latin typeface="Noto Sans CJK KR"/>
+                          <a:ea typeface="Noto Sans CJK KR"/>
+                          <a:cs typeface="Noto Sans CJK KR"/>
+                        </a:rPr>
+                        <a:t> </a:t>
+                      </a:r>
+                      <a:r>
+                        <a:rPr sz="750" b="0" dirty="0" err="1">
+                          <a:solidFill>
+                            <a:srgbClr val="182E43"/>
+                          </a:solidFill>
+                          <a:latin typeface="Noto Sans CJK KR"/>
+                          <a:ea typeface="Noto Sans CJK KR"/>
+                          <a:cs typeface="Noto Sans CJK KR"/>
+                        </a:rPr>
+                        <a:t>content_hash</a:t>
+                      </a:r>
+                      <a:r>
+                        <a:rPr sz="750" b="0" dirty="0">
+                          <a:solidFill>
+                            <a:srgbClr val="182E43"/>
+                          </a:solidFill>
+                          <a:latin typeface="Noto Sans CJK KR"/>
+                          <a:ea typeface="Noto Sans CJK KR"/>
+                          <a:cs typeface="Noto Sans CJK KR"/>
+                        </a:rPr>
+                        <a:t> 1자를</a:t>
                       </a:r>
                     </a:p>
                     <a:p>
@@ -5554,7 +7440,7 @@
                         </a:spcAft>
                       </a:pPr>
                       <a:r>
-                        <a:rPr sz="750" b="0">
+                        <a:rPr sz="750" b="0" dirty="0" err="1">
                           <a:solidFill>
                             <a:srgbClr val="182E43"/>
                           </a:solidFill>
@@ -5562,8 +7448,126 @@
                           <a:ea typeface="Noto Sans CJK KR"/>
                           <a:cs typeface="Noto Sans CJK KR"/>
                         </a:rPr>
-                        <a:t>무작위 위치에 변조 후 재검증 · 10회 반복</a:t>
-                      </a:r>
+                        <a:t>무작위</a:t>
+                      </a:r>
+                      <a:r>
+                        <a:rPr sz="750" b="0" dirty="0">
+                          <a:solidFill>
+                            <a:srgbClr val="182E43"/>
+                          </a:solidFill>
+                          <a:latin typeface="Noto Sans CJK KR"/>
+                          <a:ea typeface="Noto Sans CJK KR"/>
+                          <a:cs typeface="Noto Sans CJK KR"/>
+                        </a:rPr>
+                        <a:t> </a:t>
+                      </a:r>
+                      <a:r>
+                        <a:rPr sz="750" b="0" dirty="0" err="1">
+                          <a:solidFill>
+                            <a:srgbClr val="182E43"/>
+                          </a:solidFill>
+                          <a:latin typeface="Noto Sans CJK KR"/>
+                          <a:ea typeface="Noto Sans CJK KR"/>
+                          <a:cs typeface="Noto Sans CJK KR"/>
+                        </a:rPr>
+                        <a:t>위치에</a:t>
+                      </a:r>
+                      <a:r>
+                        <a:rPr sz="750" b="0" dirty="0">
+                          <a:solidFill>
+                            <a:srgbClr val="182E43"/>
+                          </a:solidFill>
+                          <a:latin typeface="Noto Sans CJK KR"/>
+                          <a:ea typeface="Noto Sans CJK KR"/>
+                          <a:cs typeface="Noto Sans CJK KR"/>
+                        </a:rPr>
+                        <a:t> </a:t>
+                      </a:r>
+                      <a:r>
+                        <a:rPr sz="750" b="0" dirty="0" err="1">
+                          <a:solidFill>
+                            <a:srgbClr val="182E43"/>
+                          </a:solidFill>
+                          <a:latin typeface="Noto Sans CJK KR"/>
+                          <a:ea typeface="Noto Sans CJK KR"/>
+                          <a:cs typeface="Noto Sans CJK KR"/>
+                        </a:rPr>
+                        <a:t>변조</a:t>
+                      </a:r>
+                      <a:r>
+                        <a:rPr sz="750" b="0" dirty="0">
+                          <a:solidFill>
+                            <a:srgbClr val="182E43"/>
+                          </a:solidFill>
+                          <a:latin typeface="Noto Sans CJK KR"/>
+                          <a:ea typeface="Noto Sans CJK KR"/>
+                          <a:cs typeface="Noto Sans CJK KR"/>
+                        </a:rPr>
+                        <a:t> </a:t>
+                      </a:r>
+                      <a:r>
+                        <a:rPr sz="750" b="0" dirty="0" err="1">
+                          <a:solidFill>
+                            <a:srgbClr val="182E43"/>
+                          </a:solidFill>
+                          <a:latin typeface="Noto Sans CJK KR"/>
+                          <a:ea typeface="Noto Sans CJK KR"/>
+                          <a:cs typeface="Noto Sans CJK KR"/>
+                        </a:rPr>
+                        <a:t>후</a:t>
+                      </a:r>
+                      <a:r>
+                        <a:rPr sz="750" b="0" dirty="0">
+                          <a:solidFill>
+                            <a:srgbClr val="182E43"/>
+                          </a:solidFill>
+                          <a:latin typeface="Noto Sans CJK KR"/>
+                          <a:ea typeface="Noto Sans CJK KR"/>
+                          <a:cs typeface="Noto Sans CJK KR"/>
+                        </a:rPr>
+                        <a:t> </a:t>
+                      </a:r>
+                      <a:r>
+                        <a:rPr sz="750" b="0" dirty="0" err="1">
+                          <a:solidFill>
+                            <a:srgbClr val="182E43"/>
+                          </a:solidFill>
+                          <a:latin typeface="Noto Sans CJK KR"/>
+                          <a:ea typeface="Noto Sans CJK KR"/>
+                          <a:cs typeface="Noto Sans CJK KR"/>
+                        </a:rPr>
+                        <a:t>재검증</a:t>
+                      </a:r>
+                      <a:r>
+                        <a:rPr sz="750" b="0" dirty="0">
+                          <a:solidFill>
+                            <a:srgbClr val="182E43"/>
+                          </a:solidFill>
+                          <a:latin typeface="Noto Sans CJK KR"/>
+                          <a:ea typeface="Noto Sans CJK KR"/>
+                          <a:cs typeface="Noto Sans CJK KR"/>
+                        </a:rPr>
+                        <a:t> · 10회 </a:t>
+                      </a:r>
+                      <a:r>
+                        <a:rPr sz="750" b="0" dirty="0" err="1">
+                          <a:solidFill>
+                            <a:srgbClr val="182E43"/>
+                          </a:solidFill>
+                          <a:latin typeface="Noto Sans CJK KR"/>
+                          <a:ea typeface="Noto Sans CJK KR"/>
+                          <a:cs typeface="Noto Sans CJK KR"/>
+                        </a:rPr>
+                        <a:t>반복</a:t>
+                      </a:r>
+                      <a:endParaRPr sz="750" b="0" dirty="0">
+                        <a:solidFill>
+                          <a:srgbClr val="182E43"/>
+                        </a:solidFill>
+                        <a:latin typeface="Noto Sans CJK KR"/>
+                        <a:ea typeface="Noto Sans CJK KR"/>
+                        <a:cs typeface="Noto Sans CJK KR"/>
+                      </a:endParaRPr>
                     </a:p>
                   </a:txBody>
                   <a:tcPr marL="142875" marR="142875" marT="27432" marB="27432" anchor="ctr">
@@ -5574,7 +7578,7 @@
                 </a:tc>
                 <a:tc>
                   <a:txBody>
-                    <a:bodyPr wrap="square"/>
+                    <a:bodyPr/>
                     <a:lstStyle/>
                     <a:p>
                       <a:pPr>
@@ -5621,7 +7625,7 @@
                 </a:tc>
                 <a:tc>
                   <a:txBody>
-                    <a:bodyPr wrap="square"/>
+                    <a:bodyPr/>
                     <a:lstStyle/>
                     <a:p>
                       <a:pPr>
@@ -5668,7 +7672,7 @@
                 </a:tc>
                 <a:tc>
                   <a:txBody>
-                    <a:bodyPr wrap="square"/>
+                    <a:bodyPr/>
                     <a:lstStyle/>
                     <a:p>
                       <a:pPr>
@@ -5722,7 +7726,7 @@
               <a:tr h="274320">
                 <a:tc>
                   <a:txBody>
-                    <a:bodyPr wrap="square"/>
+                    <a:bodyPr/>
                     <a:lstStyle/>
                     <a:p>
                       <a:pPr>
@@ -5755,7 +7759,7 @@
                 </a:tc>
                 <a:tc>
                   <a:txBody>
-                    <a:bodyPr wrap="square"/>
+                    <a:bodyPr/>
                     <a:lstStyle/>
                     <a:p>
                       <a:pPr>
@@ -5788,7 +7792,7 @@
                 </a:tc>
                 <a:tc>
                   <a:txBody>
-                    <a:bodyPr wrap="square"/>
+                    <a:bodyPr/>
                     <a:lstStyle/>
                     <a:p>
                       <a:pPr>
@@ -5821,7 +7825,7 @@
                 </a:tc>
                 <a:tc>
                   <a:txBody>
-                    <a:bodyPr wrap="square"/>
+                    <a:bodyPr/>
                     <a:lstStyle/>
                     <a:p>
                       <a:pPr>
@@ -5854,7 +7858,7 @@
                 </a:tc>
                 <a:tc>
                   <a:txBody>
-                    <a:bodyPr wrap="square"/>
+                    <a:bodyPr/>
                     <a:lstStyle/>
                     <a:p>
                       <a:pPr>
@@ -5863,9 +7867,50 @@
                         </a:spcAft>
                       </a:pPr>
                       <a:r>
-                        <a:rPr sz="750"/>
-                        <a:t>앱 내장 AI(Copilot 등)는 클립보드를 거치지</a:t>
-                      </a:r>
+                        <a:rPr sz="750" dirty="0" err="1"/>
+                        <a:t>앱</a:t>
+                      </a:r>
+                      <a:r>
+                        <a:rPr sz="750" dirty="0"/>
+                        <a:t> </a:t>
+                      </a:r>
+                      <a:r>
+                        <a:rPr sz="750" dirty="0" err="1"/>
+                        <a:t>내장</a:t>
+                      </a:r>
+                      <a:r>
+                        <a:rPr sz="750" dirty="0"/>
+                        <a:t> AI(Copilot </a:t>
+                      </a:r>
+                      <a:r>
+                        <a:rPr sz="750" dirty="0" err="1"/>
+                        <a:t>등</a:t>
+                      </a:r>
+                      <a:r>
+                        <a:rPr sz="750" dirty="0"/>
+                        <a:t>)</a:t>
+                      </a:r>
+                      <a:r>
+                        <a:rPr sz="750" dirty="0" err="1"/>
+                        <a:t>는</a:t>
+                      </a:r>
+                      <a:r>
+                        <a:rPr sz="750" dirty="0"/>
+                        <a:t> </a:t>
+                      </a:r>
+                      <a:r>
+                        <a:rPr sz="750" dirty="0" err="1"/>
+                        <a:t>클립보드를</a:t>
+                      </a:r>
+                      <a:r>
+                        <a:rPr sz="750" dirty="0"/>
+                        <a:t> </a:t>
+                      </a:r>
+                      <a:r>
+                        <a:rPr sz="750" dirty="0" err="1"/>
+                        <a:t>거치지</a:t>
+                      </a:r>
+                      <a:endParaRPr sz="750" dirty="0"/>
                     </a:p>
                     <a:p>
                       <a:pPr>
@@ -5874,9 +7919,58 @@
                         </a:spcAft>
                       </a:pPr>
                       <a:r>
-                        <a:rPr sz="750"/>
-                        <a:t>않아 탐지 불가 → 파일 변화량으로 간접 관측</a:t>
-                      </a:r>
+                        <a:rPr sz="750" dirty="0" err="1"/>
+                        <a:t>않아</a:t>
+                      </a:r>
+                      <a:r>
+                        <a:rPr sz="750" dirty="0"/>
+                        <a:t> </a:t>
+                      </a:r>
+                      <a:r>
+                        <a:rPr sz="750" dirty="0" err="1"/>
+                        <a:t>탐지</a:t>
+                      </a:r>
+                      <a:r>
+                        <a:rPr sz="750" dirty="0"/>
+                        <a:t> </a:t>
+                      </a:r>
+                      <a:r>
+                        <a:rPr sz="750" dirty="0" err="1"/>
+                        <a:t>불가</a:t>
+                      </a:r>
+                      <a:r>
+                        <a:rPr sz="750" dirty="0"/>
+                        <a:t> → </a:t>
+                      </a:r>
+                      <a:r>
+                        <a:rPr sz="750" dirty="0" err="1"/>
+                        <a:t>파일</a:t>
+                      </a:r>
+                      <a:r>
+                        <a:rPr sz="750" dirty="0"/>
+                        <a:t> </a:t>
+                      </a:r>
+                      <a:r>
+                        <a:rPr sz="750" dirty="0" err="1"/>
+                        <a:t>변화량으로</a:t>
+                      </a:r>
+                      <a:r>
+                        <a:rPr sz="750" dirty="0"/>
+                        <a:t> </a:t>
+                      </a:r>
+                      <a:r>
+                        <a:rPr sz="750" dirty="0" err="1"/>
+                        <a:t>간접</a:t>
+                      </a:r>
+                      <a:r>
+                        <a:rPr sz="750" dirty="0"/>
+                        <a:t> </a:t>
+                      </a:r>
+                      <a:r>
+                        <a:rPr sz="750" dirty="0" err="1"/>
+                        <a:t>관측</a:t>
+                      </a:r>
+                      <a:endParaRPr sz="750" dirty="0"/>
                     </a:p>
                   </a:txBody>
                   <a:tcPr marL="142875" marR="142875" marT="27432" marB="27432" anchor="ctr">
@@ -5887,7 +7981,7 @@
                 </a:tc>
                 <a:extLst>
                   <a:ext uri="{0D108BD9-81ED-4DB2-BD59-A6C34878D82A}">
-                    <a16:rowId xmlns:a16="http://schemas.microsoft.com/office/drawing/2014/main" val="10001"/>
+                    <a16:rowId xmlns:a16="http://schemas.microsoft.com/office/drawing/2014/main" val="2871574879"/>
                   </a:ext>
                 </a:extLst>
               </a:tr>
